--- a/test/manulife-sinochem-vs-aia.pptx
+++ b/test/manulife-sinochem-vs-aia.pptx
@@ -3152,7 +3152,7 @@
       </p:sp>
       <p:pic>
         <p:nvPicPr>
-          <p:cNvPr id="3" name="Picture 2" descr="img_4848265728.png"/>
+          <p:cNvPr id="3" name="Picture 2" descr="img_4463456448.png"/>
           <p:cNvPicPr>
             <a:picLocks noChangeAspect="1"/>
           </p:cNvPicPr>
@@ -3183,15 +3183,15 @@
         <p:spPr>
           <a:xfrm>
             <a:off x="5802595" y="2441674"/>
-            <a:ext cx="701077" cy="152400"/>
-          </a:xfrm>
-          <a:prstGeom prst="rect">
-            <a:avLst/>
-          </a:prstGeom>
-          <a:noFill/>
-        </p:spPr>
-        <p:txBody>
-          <a:bodyPr wrap="none" lIns="0" rIns="0" tIns="0" bIns="0">
+            <a:ext cx="726477" cy="153670"/>
+          </a:xfrm>
+          <a:prstGeom prst="rect">
+            <a:avLst/>
+          </a:prstGeom>
+          <a:noFill/>
+        </p:spPr>
+        <p:txBody>
+          <a:bodyPr wrap="square" lIns="0" rIns="0" tIns="0" bIns="0">
             <a:spAutoFit/>
           </a:bodyPr>
           <a:lstStyle/>
@@ -3219,16 +3219,16 @@
         </p:nvSpPr>
         <p:spPr>
           <a:xfrm>
-            <a:off x="5199843" y="2642294"/>
-            <a:ext cx="1906581" cy="692150"/>
-          </a:xfrm>
-          <a:prstGeom prst="rect">
-            <a:avLst/>
-          </a:prstGeom>
-          <a:noFill/>
-        </p:spPr>
-        <p:txBody>
-          <a:bodyPr wrap="none" lIns="0" rIns="0" tIns="0" bIns="0">
+            <a:off x="4916871" y="2642294"/>
+            <a:ext cx="2723984" cy="803909"/>
+          </a:xfrm>
+          <a:prstGeom prst="rect">
+            <a:avLst/>
+          </a:prstGeom>
+          <a:noFill/>
+        </p:spPr>
+        <p:txBody>
+          <a:bodyPr wrap="square" lIns="0" rIns="0" tIns="0" bIns="0">
             <a:spAutoFit/>
           </a:bodyPr>
           <a:lstStyle/>
@@ -3261,15 +3261,15 @@
         <p:spPr>
           <a:xfrm>
             <a:off x="4916871" y="3190875"/>
-            <a:ext cx="2472524" cy="692150"/>
-          </a:xfrm>
-          <a:prstGeom prst="rect">
-            <a:avLst/>
-          </a:prstGeom>
-          <a:noFill/>
-        </p:spPr>
-        <p:txBody>
-          <a:bodyPr wrap="none" lIns="0" rIns="0" tIns="0" bIns="0">
+            <a:ext cx="2787484" cy="803909"/>
+          </a:xfrm>
+          <a:prstGeom prst="rect">
+            <a:avLst/>
+          </a:prstGeom>
+          <a:noFill/>
+        </p:spPr>
+        <p:txBody>
+          <a:bodyPr wrap="square" lIns="0" rIns="0" tIns="0" bIns="0">
             <a:spAutoFit/>
           </a:bodyPr>
           <a:lstStyle/>
@@ -3302,15 +3302,15 @@
         <p:spPr>
           <a:xfrm>
             <a:off x="5238736" y="4239716"/>
-            <a:ext cx="1828794" cy="190500"/>
-          </a:xfrm>
-          <a:prstGeom prst="rect">
-            <a:avLst/>
-          </a:prstGeom>
-          <a:noFill/>
-        </p:spPr>
-        <p:txBody>
-          <a:bodyPr wrap="none" lIns="0" rIns="0" tIns="0" bIns="0">
+            <a:ext cx="1869434" cy="199389"/>
+          </a:xfrm>
+          <a:prstGeom prst="rect">
+            <a:avLst/>
+          </a:prstGeom>
+          <a:noFill/>
+        </p:spPr>
+        <p:txBody>
+          <a:bodyPr wrap="square" lIns="0" rIns="0" tIns="0" bIns="0">
             <a:spAutoFit/>
           </a:bodyPr>
           <a:lstStyle/>
@@ -3343,15 +3343,15 @@
         <p:spPr>
           <a:xfrm>
             <a:off x="694033" y="6216054"/>
-            <a:ext cx="662977" cy="222250"/>
-          </a:xfrm>
-          <a:prstGeom prst="rect">
-            <a:avLst/>
-          </a:prstGeom>
-          <a:noFill/>
-        </p:spPr>
-        <p:txBody>
-          <a:bodyPr wrap="none" lIns="0" rIns="0" tIns="0" bIns="0">
+            <a:ext cx="721905" cy="237998"/>
+          </a:xfrm>
+          <a:prstGeom prst="rect">
+            <a:avLst/>
+          </a:prstGeom>
+          <a:noFill/>
+        </p:spPr>
+        <p:txBody>
+          <a:bodyPr wrap="square" lIns="0" rIns="0" tIns="0" bIns="0">
             <a:spAutoFit/>
           </a:bodyPr>
           <a:lstStyle/>
@@ -3451,15 +3451,15 @@
         <p:spPr>
           <a:xfrm>
             <a:off x="5643845" y="2362299"/>
-            <a:ext cx="1018477" cy="133349"/>
-          </a:xfrm>
-          <a:prstGeom prst="rect">
-            <a:avLst/>
-          </a:prstGeom>
-          <a:noFill/>
-        </p:spPr>
-        <p:txBody>
-          <a:bodyPr wrap="none" lIns="0" rIns="0" tIns="0" bIns="0">
+            <a:ext cx="1043877" cy="133349"/>
+          </a:xfrm>
+          <a:prstGeom prst="rect">
+            <a:avLst/>
+          </a:prstGeom>
+          <a:noFill/>
+        </p:spPr>
+        <p:txBody>
+          <a:bodyPr wrap="square" lIns="0" rIns="0" tIns="0" bIns="0">
             <a:spAutoFit/>
           </a:bodyPr>
           <a:lstStyle/>
@@ -3488,15 +3488,15 @@
         <p:spPr>
           <a:xfrm>
             <a:off x="5100227" y="2543869"/>
-            <a:ext cx="2105713" cy="762000"/>
-          </a:xfrm>
-          <a:prstGeom prst="rect">
-            <a:avLst/>
-          </a:prstGeom>
-          <a:noFill/>
-        </p:spPr>
-        <p:txBody>
-          <a:bodyPr wrap="none" lIns="0" rIns="0" tIns="0" bIns="0">
+            <a:ext cx="2461312" cy="889000"/>
+          </a:xfrm>
+          <a:prstGeom prst="rect">
+            <a:avLst/>
+          </a:prstGeom>
+          <a:noFill/>
+        </p:spPr>
+        <p:txBody>
+          <a:bodyPr wrap="square" lIns="0" rIns="0" tIns="0" bIns="0">
             <a:spAutoFit/>
           </a:bodyPr>
           <a:lstStyle/>
@@ -3529,15 +3529,15 @@
         <p:spPr>
           <a:xfrm>
             <a:off x="5581635" y="3653730"/>
-            <a:ext cx="1142996" cy="190500"/>
-          </a:xfrm>
-          <a:prstGeom prst="rect">
-            <a:avLst/>
-          </a:prstGeom>
-          <a:noFill/>
-        </p:spPr>
-        <p:txBody>
-          <a:bodyPr wrap="none" lIns="0" rIns="0" tIns="0" bIns="0">
+            <a:ext cx="1183636" cy="199389"/>
+          </a:xfrm>
+          <a:prstGeom prst="rect">
+            <a:avLst/>
+          </a:prstGeom>
+          <a:noFill/>
+        </p:spPr>
+        <p:txBody>
+          <a:bodyPr wrap="square" lIns="0" rIns="0" tIns="0" bIns="0">
             <a:spAutoFit/>
           </a:bodyPr>
           <a:lstStyle/>
@@ -3570,15 +3570,15 @@
         <p:spPr>
           <a:xfrm>
             <a:off x="4940287" y="3980060"/>
-            <a:ext cx="2425693" cy="279400"/>
-          </a:xfrm>
-          <a:prstGeom prst="rect">
-            <a:avLst/>
-          </a:prstGeom>
-          <a:noFill/>
-        </p:spPr>
-        <p:txBody>
-          <a:bodyPr wrap="none" lIns="0" rIns="0" tIns="0" bIns="0">
+            <a:ext cx="2517132" cy="307340"/>
+          </a:xfrm>
+          <a:prstGeom prst="rect">
+            <a:avLst/>
+          </a:prstGeom>
+          <a:noFill/>
+        </p:spPr>
+        <p:txBody>
+          <a:bodyPr wrap="square" lIns="0" rIns="0" tIns="0" bIns="0">
             <a:spAutoFit/>
           </a:bodyPr>
           <a:lstStyle/>
@@ -3611,15 +3611,15 @@
         <p:spPr>
           <a:xfrm>
             <a:off x="5428640" y="4359771"/>
-            <a:ext cx="1448887" cy="146050"/>
-          </a:xfrm>
-          <a:prstGeom prst="rect">
-            <a:avLst/>
-          </a:prstGeom>
-          <a:noFill/>
-        </p:spPr>
-        <p:txBody>
-          <a:bodyPr wrap="none" lIns="0" rIns="0" tIns="0" bIns="0">
+            <a:ext cx="1474286" cy="147320"/>
+          </a:xfrm>
+          <a:prstGeom prst="rect">
+            <a:avLst/>
+          </a:prstGeom>
+          <a:noFill/>
+        </p:spPr>
+        <p:txBody>
+          <a:bodyPr wrap="square" lIns="0" rIns="0" tIns="0" bIns="0">
             <a:spAutoFit/>
           </a:bodyPr>
           <a:lstStyle/>
@@ -3714,7 +3714,7 @@
         </p:nvSpPr>
         <p:spPr>
           <a:xfrm>
-            <a:off x="406323" y="3116262"/>
+            <a:off x="406398" y="3116262"/>
             <a:ext cx="5613385" cy="1343124"/>
           </a:xfrm>
           <a:prstGeom prst="roundRect">
@@ -3723,7 +3723,9 @@
             </a:avLst>
           </a:prstGeom>
           <a:solidFill>
-            <a:srgbClr val="00A758"/>
+            <a:srgbClr val="00A758">
+              <a:alpha val="6000"/>
+            </a:srgbClr>
           </a:solidFill>
           <a:ln w="9525">
             <a:solidFill>
@@ -3761,7 +3763,7 @@
         </p:nvSpPr>
         <p:spPr>
           <a:xfrm>
-            <a:off x="565073" y="3275012"/>
+            <a:off x="565148" y="3275012"/>
             <a:ext cx="228599" cy="130770"/>
           </a:xfrm>
           <a:prstGeom prst="roundRect">
@@ -3806,7 +3808,7 @@
         </p:nvSpPr>
         <p:spPr>
           <a:xfrm>
-            <a:off x="6172108" y="3116262"/>
+            <a:off x="6172184" y="3116262"/>
             <a:ext cx="5613385" cy="1343124"/>
           </a:xfrm>
           <a:prstGeom prst="roundRect">
@@ -3853,7 +3855,7 @@
         </p:nvSpPr>
         <p:spPr>
           <a:xfrm>
-            <a:off x="6330858" y="3275012"/>
+            <a:off x="6330933" y="3275012"/>
             <a:ext cx="228599" cy="130770"/>
           </a:xfrm>
           <a:prstGeom prst="roundRect">
@@ -3935,7 +3937,7 @@
       </p:sp>
       <p:pic>
         <p:nvPicPr>
-          <p:cNvPr id="8" name="Picture 7" descr="img_4848265728.png"/>
+          <p:cNvPr id="8" name="Picture 7" descr="img_4463456448.png"/>
           <p:cNvPicPr>
             <a:picLocks noChangeAspect="1"/>
           </p:cNvPicPr>
@@ -3966,15 +3968,15 @@
         <p:spPr>
           <a:xfrm>
             <a:off x="406398" y="2398613"/>
-            <a:ext cx="621007" cy="133349"/>
-          </a:xfrm>
-          <a:prstGeom prst="rect">
-            <a:avLst/>
-          </a:prstGeom>
-          <a:noFill/>
-        </p:spPr>
-        <p:txBody>
-          <a:bodyPr wrap="none" lIns="0" rIns="0" tIns="0" bIns="0">
+            <a:ext cx="11455370" cy="133349"/>
+          </a:xfrm>
+          <a:prstGeom prst="rect">
+            <a:avLst/>
+          </a:prstGeom>
+          <a:noFill/>
+        </p:spPr>
+        <p:txBody>
+          <a:bodyPr wrap="square" lIns="0" rIns="0" tIns="0" bIns="0">
             <a:spAutoFit/>
           </a:bodyPr>
           <a:lstStyle/>
@@ -4003,15 +4005,15 @@
         <p:spPr>
           <a:xfrm>
             <a:off x="406398" y="2542282"/>
-            <a:ext cx="2377472" cy="393700"/>
-          </a:xfrm>
-          <a:prstGeom prst="rect">
-            <a:avLst/>
-          </a:prstGeom>
-          <a:noFill/>
-        </p:spPr>
-        <p:txBody>
-          <a:bodyPr wrap="none" lIns="0" rIns="0" tIns="0" bIns="0">
+            <a:ext cx="11582370" cy="444500"/>
+          </a:xfrm>
+          <a:prstGeom prst="rect">
+            <a:avLst/>
+          </a:prstGeom>
+          <a:noFill/>
+        </p:spPr>
+        <p:txBody>
+          <a:bodyPr wrap="square" lIns="0" rIns="0" tIns="0" bIns="0">
             <a:spAutoFit/>
           </a:bodyPr>
           <a:lstStyle/>
@@ -4043,16 +4045,16 @@
         </p:nvSpPr>
         <p:spPr>
           <a:xfrm>
-            <a:off x="603173" y="3286422"/>
-            <a:ext cx="266698" cy="133349"/>
-          </a:xfrm>
-          <a:prstGeom prst="rect">
-            <a:avLst/>
-          </a:prstGeom>
-          <a:noFill/>
-        </p:spPr>
-        <p:txBody>
-          <a:bodyPr wrap="none" lIns="0" rIns="0" tIns="0" bIns="0">
+            <a:off x="603248" y="3286422"/>
+            <a:ext cx="292098" cy="133349"/>
+          </a:xfrm>
+          <a:prstGeom prst="rect">
+            <a:avLst/>
+          </a:prstGeom>
+          <a:noFill/>
+        </p:spPr>
+        <p:txBody>
+          <a:bodyPr wrap="square" lIns="0" rIns="0" tIns="0" bIns="0">
             <a:spAutoFit/>
           </a:bodyPr>
           <a:lstStyle/>
@@ -4080,16 +4082,16 @@
         </p:nvSpPr>
         <p:spPr>
           <a:xfrm>
-            <a:off x="844472" y="3276897"/>
-            <a:ext cx="1336968" cy="152400"/>
-          </a:xfrm>
-          <a:prstGeom prst="rect">
-            <a:avLst/>
-          </a:prstGeom>
-          <a:noFill/>
-        </p:spPr>
-        <p:txBody>
-          <a:bodyPr wrap="none" lIns="0" rIns="0" tIns="0" bIns="0">
+            <a:off x="844547" y="3276897"/>
+            <a:ext cx="5092686" cy="153670"/>
+          </a:xfrm>
+          <a:prstGeom prst="rect">
+            <a:avLst/>
+          </a:prstGeom>
+          <a:noFill/>
+        </p:spPr>
+        <p:txBody>
+          <a:bodyPr wrap="square" lIns="0" rIns="0" tIns="0" bIns="0">
             <a:spAutoFit/>
           </a:bodyPr>
           <a:lstStyle/>
@@ -4117,16 +4119,16 @@
         </p:nvSpPr>
         <p:spPr>
           <a:xfrm>
-            <a:off x="686913" y="3508573"/>
-            <a:ext cx="401238" cy="152400"/>
-          </a:xfrm>
-          <a:prstGeom prst="rect">
-            <a:avLst/>
-          </a:prstGeom>
-          <a:noFill/>
-        </p:spPr>
-        <p:txBody>
-          <a:bodyPr wrap="none" lIns="0" rIns="0" tIns="0" bIns="0">
+            <a:off x="686988" y="3508573"/>
+            <a:ext cx="5250245" cy="153670"/>
+          </a:xfrm>
+          <a:prstGeom prst="rect">
+            <a:avLst/>
+          </a:prstGeom>
+          <a:noFill/>
+        </p:spPr>
+        <p:txBody>
+          <a:bodyPr wrap="square" lIns="0" rIns="0" tIns="0" bIns="0">
             <a:spAutoFit/>
           </a:bodyPr>
           <a:lstStyle/>
@@ -4158,16 +4160,16 @@
         </p:nvSpPr>
         <p:spPr>
           <a:xfrm>
-            <a:off x="973853" y="3514923"/>
-            <a:ext cx="320574" cy="146050"/>
-          </a:xfrm>
-          <a:prstGeom prst="rect">
-            <a:avLst/>
-          </a:prstGeom>
-          <a:noFill/>
-        </p:spPr>
-        <p:txBody>
-          <a:bodyPr wrap="none" lIns="0" rIns="0" tIns="0" bIns="0">
+            <a:off x="973928" y="3514923"/>
+            <a:ext cx="4963305" cy="147320"/>
+          </a:xfrm>
+          <a:prstGeom prst="rect">
+            <a:avLst/>
+          </a:prstGeom>
+          <a:noFill/>
+        </p:spPr>
+        <p:txBody>
+          <a:bodyPr wrap="square" lIns="0" rIns="0" tIns="0" bIns="0">
             <a:spAutoFit/>
           </a:bodyPr>
           <a:lstStyle/>
@@ -4199,16 +4201,16 @@
         </p:nvSpPr>
         <p:spPr>
           <a:xfrm>
-            <a:off x="1180128" y="3508573"/>
-            <a:ext cx="490138" cy="152400"/>
-          </a:xfrm>
-          <a:prstGeom prst="rect">
-            <a:avLst/>
-          </a:prstGeom>
-          <a:noFill/>
-        </p:spPr>
-        <p:txBody>
-          <a:bodyPr wrap="none" lIns="0" rIns="0" tIns="0" bIns="0">
+            <a:off x="1180204" y="3508573"/>
+            <a:ext cx="4757030" cy="153670"/>
+          </a:xfrm>
+          <a:prstGeom prst="rect">
+            <a:avLst/>
+          </a:prstGeom>
+          <a:noFill/>
+        </p:spPr>
+        <p:txBody>
+          <a:bodyPr wrap="square" lIns="0" rIns="0" tIns="0" bIns="0">
             <a:spAutoFit/>
           </a:bodyPr>
           <a:lstStyle/>
@@ -4240,16 +4242,16 @@
         </p:nvSpPr>
         <p:spPr>
           <a:xfrm>
-            <a:off x="1555968" y="3508573"/>
-            <a:ext cx="292098" cy="152400"/>
-          </a:xfrm>
-          <a:prstGeom prst="rect">
-            <a:avLst/>
-          </a:prstGeom>
-          <a:noFill/>
-        </p:spPr>
-        <p:txBody>
-          <a:bodyPr wrap="none" lIns="0" rIns="0" tIns="0" bIns="0">
+            <a:off x="1556043" y="3508573"/>
+            <a:ext cx="4381190" cy="153670"/>
+          </a:xfrm>
+          <a:prstGeom prst="rect">
+            <a:avLst/>
+          </a:prstGeom>
+          <a:noFill/>
+        </p:spPr>
+        <p:txBody>
+          <a:bodyPr wrap="square" lIns="0" rIns="0" tIns="0" bIns="0">
             <a:spAutoFit/>
           </a:bodyPr>
           <a:lstStyle/>
@@ -4281,16 +4283,16 @@
         </p:nvSpPr>
         <p:spPr>
           <a:xfrm>
-            <a:off x="1733767" y="3508573"/>
-            <a:ext cx="825497" cy="152400"/>
-          </a:xfrm>
-          <a:prstGeom prst="rect">
-            <a:avLst/>
-          </a:prstGeom>
-          <a:noFill/>
-        </p:spPr>
-        <p:txBody>
-          <a:bodyPr wrap="none" lIns="0" rIns="0" tIns="0" bIns="0">
+            <a:off x="1733843" y="3508573"/>
+            <a:ext cx="4203390" cy="153670"/>
+          </a:xfrm>
+          <a:prstGeom prst="rect">
+            <a:avLst/>
+          </a:prstGeom>
+          <a:noFill/>
+        </p:spPr>
+        <p:txBody>
+          <a:bodyPr wrap="square" lIns="0" rIns="0" tIns="0" bIns="0">
             <a:spAutoFit/>
           </a:bodyPr>
           <a:lstStyle/>
@@ -4322,16 +4324,16 @@
         </p:nvSpPr>
         <p:spPr>
           <a:xfrm>
-            <a:off x="686913" y="3716734"/>
-            <a:ext cx="825497" cy="152400"/>
-          </a:xfrm>
-          <a:prstGeom prst="rect">
-            <a:avLst/>
-          </a:prstGeom>
-          <a:noFill/>
-        </p:spPr>
-        <p:txBody>
-          <a:bodyPr wrap="none" lIns="0" rIns="0" tIns="0" bIns="0">
+            <a:off x="686988" y="3716734"/>
+            <a:ext cx="5250245" cy="153670"/>
+          </a:xfrm>
+          <a:prstGeom prst="rect">
+            <a:avLst/>
+          </a:prstGeom>
+          <a:noFill/>
+        </p:spPr>
+        <p:txBody>
+          <a:bodyPr wrap="square" lIns="0" rIns="0" tIns="0" bIns="0">
             <a:spAutoFit/>
           </a:bodyPr>
           <a:lstStyle/>
@@ -4363,16 +4365,16 @@
         </p:nvSpPr>
         <p:spPr>
           <a:xfrm>
-            <a:off x="1398111" y="3723084"/>
-            <a:ext cx="317696" cy="146050"/>
-          </a:xfrm>
-          <a:prstGeom prst="rect">
-            <a:avLst/>
-          </a:prstGeom>
-          <a:noFill/>
-        </p:spPr>
-        <p:txBody>
-          <a:bodyPr wrap="none" lIns="0" rIns="0" tIns="0" bIns="0">
+            <a:off x="1398187" y="3723084"/>
+            <a:ext cx="4539047" cy="147320"/>
+          </a:xfrm>
+          <a:prstGeom prst="rect">
+            <a:avLst/>
+          </a:prstGeom>
+          <a:noFill/>
+        </p:spPr>
+        <p:txBody>
+          <a:bodyPr wrap="square" lIns="0" rIns="0" tIns="0" bIns="0">
             <a:spAutoFit/>
           </a:bodyPr>
           <a:lstStyle/>
@@ -4404,16 +4406,16 @@
         </p:nvSpPr>
         <p:spPr>
           <a:xfrm>
-            <a:off x="1601509" y="3716734"/>
-            <a:ext cx="469897" cy="152400"/>
-          </a:xfrm>
-          <a:prstGeom prst="rect">
-            <a:avLst/>
-          </a:prstGeom>
-          <a:noFill/>
-        </p:spPr>
-        <p:txBody>
-          <a:bodyPr wrap="none" lIns="0" rIns="0" tIns="0" bIns="0">
+            <a:off x="1601584" y="3716734"/>
+            <a:ext cx="4335649" cy="153670"/>
+          </a:xfrm>
+          <a:prstGeom prst="rect">
+            <a:avLst/>
+          </a:prstGeom>
+          <a:noFill/>
+        </p:spPr>
+        <p:txBody>
+          <a:bodyPr wrap="square" lIns="0" rIns="0" tIns="0" bIns="0">
             <a:spAutoFit/>
           </a:bodyPr>
           <a:lstStyle/>
@@ -4445,16 +4447,16 @@
         </p:nvSpPr>
         <p:spPr>
           <a:xfrm>
-            <a:off x="686913" y="3924895"/>
-            <a:ext cx="1427257" cy="152400"/>
-          </a:xfrm>
-          <a:prstGeom prst="rect">
-            <a:avLst/>
-          </a:prstGeom>
-          <a:noFill/>
-        </p:spPr>
-        <p:txBody>
-          <a:bodyPr wrap="none" lIns="0" rIns="0" tIns="0" bIns="0">
+            <a:off x="686988" y="3924895"/>
+            <a:ext cx="5250245" cy="153670"/>
+          </a:xfrm>
+          <a:prstGeom prst="rect">
+            <a:avLst/>
+          </a:prstGeom>
+          <a:noFill/>
+        </p:spPr>
+        <p:txBody>
+          <a:bodyPr wrap="square" lIns="0" rIns="0" tIns="0" bIns="0">
             <a:spAutoFit/>
           </a:bodyPr>
           <a:lstStyle/>
@@ -4486,16 +4488,16 @@
         </p:nvSpPr>
         <p:spPr>
           <a:xfrm>
-            <a:off x="686913" y="4133056"/>
-            <a:ext cx="380998" cy="152400"/>
-          </a:xfrm>
-          <a:prstGeom prst="rect">
-            <a:avLst/>
-          </a:prstGeom>
-          <a:noFill/>
-        </p:spPr>
-        <p:txBody>
-          <a:bodyPr wrap="none" lIns="0" rIns="0" tIns="0" bIns="0">
+            <a:off x="686988" y="4133056"/>
+            <a:ext cx="5250245" cy="153670"/>
+          </a:xfrm>
+          <a:prstGeom prst="rect">
+            <a:avLst/>
+          </a:prstGeom>
+          <a:noFill/>
+        </p:spPr>
+        <p:txBody>
+          <a:bodyPr wrap="square" lIns="0" rIns="0" tIns="0" bIns="0">
             <a:spAutoFit/>
           </a:bodyPr>
           <a:lstStyle/>
@@ -4527,16 +4529,16 @@
         </p:nvSpPr>
         <p:spPr>
           <a:xfrm>
-            <a:off x="953612" y="4133056"/>
-            <a:ext cx="292098" cy="152400"/>
-          </a:xfrm>
-          <a:prstGeom prst="rect">
-            <a:avLst/>
-          </a:prstGeom>
-          <a:noFill/>
-        </p:spPr>
-        <p:txBody>
-          <a:bodyPr wrap="none" lIns="0" rIns="0" tIns="0" bIns="0">
+            <a:off x="953688" y="4133056"/>
+            <a:ext cx="4983545" cy="153670"/>
+          </a:xfrm>
+          <a:prstGeom prst="rect">
+            <a:avLst/>
+          </a:prstGeom>
+          <a:noFill/>
+        </p:spPr>
+        <p:txBody>
+          <a:bodyPr wrap="square" lIns="0" rIns="0" tIns="0" bIns="0">
             <a:spAutoFit/>
           </a:bodyPr>
           <a:lstStyle/>
@@ -4568,16 +4570,16 @@
         </p:nvSpPr>
         <p:spPr>
           <a:xfrm>
-            <a:off x="6368958" y="3286422"/>
-            <a:ext cx="266698" cy="133349"/>
-          </a:xfrm>
-          <a:prstGeom prst="rect">
-            <a:avLst/>
-          </a:prstGeom>
-          <a:noFill/>
-        </p:spPr>
-        <p:txBody>
-          <a:bodyPr wrap="none" lIns="0" rIns="0" tIns="0" bIns="0">
+            <a:off x="6369033" y="3286422"/>
+            <a:ext cx="292098" cy="133349"/>
+          </a:xfrm>
+          <a:prstGeom prst="rect">
+            <a:avLst/>
+          </a:prstGeom>
+          <a:noFill/>
+        </p:spPr>
+        <p:txBody>
+          <a:bodyPr wrap="square" lIns="0" rIns="0" tIns="0" bIns="0">
             <a:spAutoFit/>
           </a:bodyPr>
           <a:lstStyle/>
@@ -4605,16 +4607,16 @@
         </p:nvSpPr>
         <p:spPr>
           <a:xfrm>
-            <a:off x="6610257" y="3276897"/>
-            <a:ext cx="633410" cy="152400"/>
-          </a:xfrm>
-          <a:prstGeom prst="rect">
-            <a:avLst/>
-          </a:prstGeom>
-          <a:noFill/>
-        </p:spPr>
-        <p:txBody>
-          <a:bodyPr wrap="none" lIns="0" rIns="0" tIns="0" bIns="0">
+            <a:off x="6610333" y="3276897"/>
+            <a:ext cx="5092686" cy="153670"/>
+          </a:xfrm>
+          <a:prstGeom prst="rect">
+            <a:avLst/>
+          </a:prstGeom>
+          <a:noFill/>
+        </p:spPr>
+        <p:txBody>
+          <a:bodyPr wrap="square" lIns="0" rIns="0" tIns="0" bIns="0">
             <a:spAutoFit/>
           </a:bodyPr>
           <a:lstStyle/>
@@ -4642,16 +4644,16 @@
         </p:nvSpPr>
         <p:spPr>
           <a:xfrm>
-            <a:off x="6452698" y="3508573"/>
-            <a:ext cx="1753884" cy="152400"/>
-          </a:xfrm>
-          <a:prstGeom prst="rect">
-            <a:avLst/>
-          </a:prstGeom>
-          <a:noFill/>
-        </p:spPr>
-        <p:txBody>
-          <a:bodyPr wrap="none" lIns="0" rIns="0" tIns="0" bIns="0">
+            <a:off x="6452774" y="3508573"/>
+            <a:ext cx="5250245" cy="153670"/>
+          </a:xfrm>
+          <a:prstGeom prst="rect">
+            <a:avLst/>
+          </a:prstGeom>
+          <a:noFill/>
+        </p:spPr>
+        <p:txBody>
+          <a:bodyPr wrap="square" lIns="0" rIns="0" tIns="0" bIns="0">
             <a:spAutoFit/>
           </a:bodyPr>
           <a:lstStyle/>
@@ -4683,16 +4685,16 @@
         </p:nvSpPr>
         <p:spPr>
           <a:xfrm>
-            <a:off x="6452698" y="3716734"/>
-            <a:ext cx="1404139" cy="152400"/>
-          </a:xfrm>
-          <a:prstGeom prst="rect">
-            <a:avLst/>
-          </a:prstGeom>
-          <a:noFill/>
-        </p:spPr>
-        <p:txBody>
-          <a:bodyPr wrap="none" lIns="0" rIns="0" tIns="0" bIns="0">
+            <a:off x="6452774" y="3716734"/>
+            <a:ext cx="5250245" cy="153670"/>
+          </a:xfrm>
+          <a:prstGeom prst="rect">
+            <a:avLst/>
+          </a:prstGeom>
+          <a:noFill/>
+        </p:spPr>
+        <p:txBody>
+          <a:bodyPr wrap="square" lIns="0" rIns="0" tIns="0" bIns="0">
             <a:spAutoFit/>
           </a:bodyPr>
           <a:lstStyle/>
@@ -4724,16 +4726,16 @@
         </p:nvSpPr>
         <p:spPr>
           <a:xfrm>
-            <a:off x="6452698" y="3924895"/>
-            <a:ext cx="1269995" cy="152400"/>
-          </a:xfrm>
-          <a:prstGeom prst="rect">
-            <a:avLst/>
-          </a:prstGeom>
-          <a:noFill/>
-        </p:spPr>
-        <p:txBody>
-          <a:bodyPr wrap="none" lIns="0" rIns="0" tIns="0" bIns="0">
+            <a:off x="6452774" y="3924895"/>
+            <a:ext cx="5250245" cy="153670"/>
+          </a:xfrm>
+          <a:prstGeom prst="rect">
+            <a:avLst/>
+          </a:prstGeom>
+          <a:noFill/>
+        </p:spPr>
+        <p:txBody>
+          <a:bodyPr wrap="square" lIns="0" rIns="0" tIns="0" bIns="0">
             <a:spAutoFit/>
           </a:bodyPr>
           <a:lstStyle/>
@@ -4765,16 +4767,16 @@
         </p:nvSpPr>
         <p:spPr>
           <a:xfrm>
-            <a:off x="6452698" y="4133056"/>
-            <a:ext cx="380997" cy="152400"/>
-          </a:xfrm>
-          <a:prstGeom prst="rect">
-            <a:avLst/>
-          </a:prstGeom>
-          <a:noFill/>
-        </p:spPr>
-        <p:txBody>
-          <a:bodyPr wrap="none" lIns="0" rIns="0" tIns="0" bIns="0">
+            <a:off x="6452774" y="4133056"/>
+            <a:ext cx="5250245" cy="153670"/>
+          </a:xfrm>
+          <a:prstGeom prst="rect">
+            <a:avLst/>
+          </a:prstGeom>
+          <a:noFill/>
+        </p:spPr>
+        <p:txBody>
+          <a:bodyPr wrap="square" lIns="0" rIns="0" tIns="0" bIns="0">
             <a:spAutoFit/>
           </a:bodyPr>
           <a:lstStyle/>
@@ -4806,16 +4808,16 @@
         </p:nvSpPr>
         <p:spPr>
           <a:xfrm>
-            <a:off x="6719397" y="4133056"/>
-            <a:ext cx="292098" cy="152400"/>
-          </a:xfrm>
-          <a:prstGeom prst="rect">
-            <a:avLst/>
-          </a:prstGeom>
-          <a:noFill/>
-        </p:spPr>
-        <p:txBody>
-          <a:bodyPr wrap="none" lIns="0" rIns="0" tIns="0" bIns="0">
+            <a:off x="6719473" y="4133056"/>
+            <a:ext cx="4983545" cy="153670"/>
+          </a:xfrm>
+          <a:prstGeom prst="rect">
+            <a:avLst/>
+          </a:prstGeom>
+          <a:noFill/>
+        </p:spPr>
+        <p:txBody>
+          <a:bodyPr wrap="square" lIns="0" rIns="0" tIns="0" bIns="0">
             <a:spAutoFit/>
           </a:bodyPr>
           <a:lstStyle/>
@@ -4848,15 +4850,15 @@
         <p:spPr>
           <a:xfrm>
             <a:off x="11515398" y="6343650"/>
-            <a:ext cx="200321" cy="133349"/>
-          </a:xfrm>
-          <a:prstGeom prst="rect">
-            <a:avLst/>
-          </a:prstGeom>
-          <a:noFill/>
-        </p:spPr>
-        <p:txBody>
-          <a:bodyPr wrap="none" lIns="0" rIns="0" tIns="0" bIns="0">
+            <a:ext cx="225721" cy="133349"/>
+          </a:xfrm>
+          <a:prstGeom prst="rect">
+            <a:avLst/>
+          </a:prstGeom>
+          <a:noFill/>
+        </p:spPr>
+        <p:txBody>
+          <a:bodyPr wrap="square" lIns="0" rIns="0" tIns="0" bIns="0">
             <a:spAutoFit/>
           </a:bodyPr>
           <a:lstStyle/>
@@ -4885,15 +4887,15 @@
         <p:spPr>
           <a:xfrm>
             <a:off x="11709370" y="6343650"/>
-            <a:ext cx="190498" cy="133349"/>
-          </a:xfrm>
-          <a:prstGeom prst="rect">
-            <a:avLst/>
-          </a:prstGeom>
-          <a:noFill/>
-        </p:spPr>
-        <p:txBody>
-          <a:bodyPr wrap="none" lIns="0" rIns="0" tIns="0" bIns="0">
+            <a:ext cx="215898" cy="133349"/>
+          </a:xfrm>
+          <a:prstGeom prst="rect">
+            <a:avLst/>
+          </a:prstGeom>
+          <a:noFill/>
+        </p:spPr>
+        <p:txBody>
+          <a:bodyPr wrap="square" lIns="0" rIns="0" tIns="0" bIns="0">
             <a:spAutoFit/>
           </a:bodyPr>
           <a:lstStyle/>
@@ -4922,15 +4924,15 @@
         <p:spPr>
           <a:xfrm>
             <a:off x="694033" y="6216054"/>
-            <a:ext cx="662977" cy="222250"/>
-          </a:xfrm>
-          <a:prstGeom prst="rect">
-            <a:avLst/>
-          </a:prstGeom>
-          <a:noFill/>
-        </p:spPr>
-        <p:txBody>
-          <a:bodyPr wrap="none" lIns="0" rIns="0" tIns="0" bIns="0">
+            <a:ext cx="721905" cy="237998"/>
+          </a:xfrm>
+          <a:prstGeom prst="rect">
+            <a:avLst/>
+          </a:prstGeom>
+          <a:noFill/>
+        </p:spPr>
+        <p:txBody>
+          <a:bodyPr wrap="square" lIns="0" rIns="0" tIns="0" bIns="0">
             <a:spAutoFit/>
           </a:bodyPr>
           <a:lstStyle/>
@@ -5021,7 +5023,7 @@
         </p:nvSpPr>
         <p:spPr>
           <a:xfrm>
-            <a:off x="406281" y="3243064"/>
+            <a:off x="406398" y="3243064"/>
             <a:ext cx="304799" cy="304800"/>
           </a:xfrm>
           <a:prstGeom prst="roundRect">
@@ -5066,7 +5068,7 @@
         </p:nvSpPr>
         <p:spPr>
           <a:xfrm>
-            <a:off x="6146667" y="3243064"/>
+            <a:off x="6146784" y="3243064"/>
             <a:ext cx="304799" cy="304800"/>
           </a:xfrm>
           <a:prstGeom prst="roundRect">
@@ -5207,7 +5209,7 @@
         </p:blipFill>
         <p:spPr>
           <a:xfrm>
-            <a:off x="482481" y="3319264"/>
+            <a:off x="482598" y="3319264"/>
             <a:ext cx="152399" cy="152400"/>
           </a:xfrm>
           <a:prstGeom prst="rect">
@@ -5231,7 +5233,7 @@
         </p:blipFill>
         <p:spPr>
           <a:xfrm>
-            <a:off x="6222867" y="3319264"/>
+            <a:off x="6222984" y="3319264"/>
             <a:ext cx="152399" cy="152400"/>
           </a:xfrm>
           <a:prstGeom prst="rect">
@@ -5241,7 +5243,7 @@
       </p:pic>
       <p:pic>
         <p:nvPicPr>
-          <p:cNvPr id="9" name="Picture 8" descr="img_4848265728.png"/>
+          <p:cNvPr id="9" name="Picture 8" descr="img_4463456448.png"/>
           <p:cNvPicPr>
             <a:picLocks noChangeAspect="1"/>
           </p:cNvPicPr>
@@ -5272,15 +5274,15 @@
         <p:spPr>
           <a:xfrm>
             <a:off x="406398" y="2388294"/>
-            <a:ext cx="633013" cy="133349"/>
-          </a:xfrm>
-          <a:prstGeom prst="rect">
-            <a:avLst/>
-          </a:prstGeom>
-          <a:noFill/>
-        </p:spPr>
-        <p:txBody>
-          <a:bodyPr wrap="none" lIns="0" rIns="0" tIns="0" bIns="0">
+            <a:ext cx="11455370" cy="133349"/>
+          </a:xfrm>
+          <a:prstGeom prst="rect">
+            <a:avLst/>
+          </a:prstGeom>
+          <a:noFill/>
+        </p:spPr>
+        <p:txBody>
+          <a:bodyPr wrap="square" lIns="0" rIns="0" tIns="0" bIns="0">
             <a:spAutoFit/>
           </a:bodyPr>
           <a:lstStyle/>
@@ -5309,15 +5311,15 @@
         <p:spPr>
           <a:xfrm>
             <a:off x="406398" y="2531963"/>
-            <a:ext cx="2377472" cy="393700"/>
-          </a:xfrm>
-          <a:prstGeom prst="rect">
-            <a:avLst/>
-          </a:prstGeom>
-          <a:noFill/>
-        </p:spPr>
-        <p:txBody>
-          <a:bodyPr wrap="none" lIns="0" rIns="0" tIns="0" bIns="0">
+            <a:ext cx="11582370" cy="444500"/>
+          </a:xfrm>
+          <a:prstGeom prst="rect">
+            <a:avLst/>
+          </a:prstGeom>
+          <a:noFill/>
+        </p:spPr>
+        <p:txBody>
+          <a:bodyPr wrap="square" lIns="0" rIns="0" tIns="0" bIns="0">
             <a:spAutoFit/>
           </a:bodyPr>
           <a:lstStyle/>
@@ -5349,16 +5351,16 @@
         </p:nvSpPr>
         <p:spPr>
           <a:xfrm>
-            <a:off x="812680" y="3230364"/>
-            <a:ext cx="825497" cy="279400"/>
-          </a:xfrm>
-          <a:prstGeom prst="rect">
-            <a:avLst/>
-          </a:prstGeom>
-          <a:noFill/>
-        </p:spPr>
-        <p:txBody>
-          <a:bodyPr wrap="none" lIns="0" rIns="0" tIns="0" bIns="0">
+            <a:off x="812797" y="3230364"/>
+            <a:ext cx="2568131" cy="307340"/>
+          </a:xfrm>
+          <a:prstGeom prst="rect">
+            <a:avLst/>
+          </a:prstGeom>
+          <a:noFill/>
+        </p:spPr>
+        <p:txBody>
+          <a:bodyPr wrap="square" lIns="0" rIns="0" tIns="0" bIns="0">
             <a:spAutoFit/>
           </a:bodyPr>
           <a:lstStyle/>
@@ -5390,16 +5392,16 @@
         </p:nvSpPr>
         <p:spPr>
           <a:xfrm>
-            <a:off x="812680" y="3500735"/>
-            <a:ext cx="1181096" cy="152400"/>
-          </a:xfrm>
-          <a:prstGeom prst="rect">
-            <a:avLst/>
-          </a:prstGeom>
-          <a:noFill/>
-        </p:spPr>
-        <p:txBody>
-          <a:bodyPr wrap="none" lIns="0" rIns="0" tIns="0" bIns="0">
+            <a:off x="812797" y="3500735"/>
+            <a:ext cx="2502091" cy="153670"/>
+          </a:xfrm>
+          <a:prstGeom prst="rect">
+            <a:avLst/>
+          </a:prstGeom>
+          <a:noFill/>
+        </p:spPr>
+        <p:txBody>
+          <a:bodyPr wrap="square" lIns="0" rIns="0" tIns="0" bIns="0">
             <a:spAutoFit/>
           </a:bodyPr>
           <a:lstStyle/>
@@ -5431,16 +5433,16 @@
         </p:nvSpPr>
         <p:spPr>
           <a:xfrm>
-            <a:off x="1879478" y="3507085"/>
-            <a:ext cx="317696" cy="146050"/>
-          </a:xfrm>
-          <a:prstGeom prst="rect">
-            <a:avLst/>
-          </a:prstGeom>
-          <a:noFill/>
-        </p:spPr>
-        <p:txBody>
-          <a:bodyPr wrap="none" lIns="0" rIns="0" tIns="0" bIns="0">
+            <a:off x="1879595" y="3507085"/>
+            <a:ext cx="1435293" cy="147320"/>
+          </a:xfrm>
+          <a:prstGeom prst="rect">
+            <a:avLst/>
+          </a:prstGeom>
+          <a:noFill/>
+        </p:spPr>
+        <p:txBody>
+          <a:bodyPr wrap="square" lIns="0" rIns="0" tIns="0" bIns="0">
             <a:spAutoFit/>
           </a:bodyPr>
           <a:lstStyle/>
@@ -5472,16 +5474,16 @@
         </p:nvSpPr>
         <p:spPr>
           <a:xfrm>
-            <a:off x="2082876" y="3500735"/>
-            <a:ext cx="1269996" cy="152400"/>
-          </a:xfrm>
-          <a:prstGeom prst="rect">
-            <a:avLst/>
-          </a:prstGeom>
-          <a:noFill/>
-        </p:spPr>
-        <p:txBody>
-          <a:bodyPr wrap="none" lIns="0" rIns="0" tIns="0" bIns="0">
+            <a:off x="2082993" y="3500735"/>
+            <a:ext cx="1295395" cy="153670"/>
+          </a:xfrm>
+          <a:prstGeom prst="rect">
+            <a:avLst/>
+          </a:prstGeom>
+          <a:noFill/>
+        </p:spPr>
+        <p:txBody>
+          <a:bodyPr wrap="square" lIns="0" rIns="0" tIns="0" bIns="0">
             <a:spAutoFit/>
           </a:bodyPr>
           <a:lstStyle/>
@@ -5513,16 +5515,16 @@
         </p:nvSpPr>
         <p:spPr>
           <a:xfrm>
-            <a:off x="6553066" y="3230364"/>
-            <a:ext cx="825497" cy="279400"/>
-          </a:xfrm>
-          <a:prstGeom prst="rect">
-            <a:avLst/>
-          </a:prstGeom>
-          <a:noFill/>
-        </p:spPr>
-        <p:txBody>
-          <a:bodyPr wrap="none" lIns="0" rIns="0" tIns="0" bIns="0">
+            <a:off x="6553183" y="3230364"/>
+            <a:ext cx="1979467" cy="307340"/>
+          </a:xfrm>
+          <a:prstGeom prst="rect">
+            <a:avLst/>
+          </a:prstGeom>
+          <a:noFill/>
+        </p:spPr>
+        <p:txBody>
+          <a:bodyPr wrap="square" lIns="0" rIns="0" tIns="0" bIns="0">
             <a:spAutoFit/>
           </a:bodyPr>
           <a:lstStyle/>
@@ -5554,16 +5556,16 @@
         </p:nvSpPr>
         <p:spPr>
           <a:xfrm>
-            <a:off x="6553066" y="3500735"/>
-            <a:ext cx="1951527" cy="152400"/>
-          </a:xfrm>
-          <a:prstGeom prst="rect">
-            <a:avLst/>
-          </a:prstGeom>
-          <a:noFill/>
-        </p:spPr>
-        <p:txBody>
-          <a:bodyPr wrap="none" lIns="0" rIns="0" tIns="0" bIns="0">
+            <a:off x="6553183" y="3500735"/>
+            <a:ext cx="1976927" cy="153670"/>
+          </a:xfrm>
+          <a:prstGeom prst="rect">
+            <a:avLst/>
+          </a:prstGeom>
+          <a:noFill/>
+        </p:spPr>
+        <p:txBody>
+          <a:bodyPr wrap="square" lIns="0" rIns="0" tIns="0" bIns="0">
             <a:spAutoFit/>
           </a:bodyPr>
           <a:lstStyle/>
@@ -5596,15 +5598,15 @@
         <p:spPr>
           <a:xfrm>
             <a:off x="577848" y="3989685"/>
-            <a:ext cx="1254021" cy="184150"/>
-          </a:xfrm>
-          <a:prstGeom prst="rect">
-            <a:avLst/>
-          </a:prstGeom>
-          <a:noFill/>
-        </p:spPr>
-        <p:txBody>
-          <a:bodyPr wrap="none" lIns="0" rIns="0" tIns="0" bIns="0">
+            <a:ext cx="11144728" cy="192278"/>
+          </a:xfrm>
+          <a:prstGeom prst="rect">
+            <a:avLst/>
+          </a:prstGeom>
+          <a:noFill/>
+        </p:spPr>
+        <p:txBody>
+          <a:bodyPr wrap="square" lIns="0" rIns="0" tIns="0" bIns="0">
             <a:spAutoFit/>
           </a:bodyPr>
           <a:lstStyle/>
@@ -5637,15 +5639,15 @@
         <p:spPr>
           <a:xfrm>
             <a:off x="1717571" y="3989685"/>
-            <a:ext cx="3045213" cy="184150"/>
-          </a:xfrm>
-          <a:prstGeom prst="rect">
-            <a:avLst/>
-          </a:prstGeom>
-          <a:noFill/>
-        </p:spPr>
-        <p:txBody>
-          <a:bodyPr wrap="none" lIns="0" rIns="0" tIns="0" bIns="0">
+            <a:ext cx="10005006" cy="192278"/>
+          </a:xfrm>
+          <a:prstGeom prst="rect">
+            <a:avLst/>
+          </a:prstGeom>
+          <a:noFill/>
+        </p:spPr>
+        <p:txBody>
+          <a:bodyPr wrap="square" lIns="0" rIns="0" tIns="0" bIns="0">
             <a:spAutoFit/>
           </a:bodyPr>
           <a:lstStyle/>
@@ -5678,15 +5680,15 @@
         <p:spPr>
           <a:xfrm>
             <a:off x="577848" y="4183856"/>
-            <a:ext cx="3403590" cy="152400"/>
-          </a:xfrm>
-          <a:prstGeom prst="rect">
-            <a:avLst/>
-          </a:prstGeom>
-          <a:noFill/>
-        </p:spPr>
-        <p:txBody>
-          <a:bodyPr wrap="none" lIns="0" rIns="0" tIns="0" bIns="0">
+            <a:ext cx="11131520" cy="153670"/>
+          </a:xfrm>
+          <a:prstGeom prst="rect">
+            <a:avLst/>
+          </a:prstGeom>
+          <a:noFill/>
+        </p:spPr>
+        <p:txBody>
+          <a:bodyPr wrap="square" lIns="0" rIns="0" tIns="0" bIns="0">
             <a:spAutoFit/>
           </a:bodyPr>
           <a:lstStyle/>
@@ -5719,15 +5721,15 @@
         <p:spPr>
           <a:xfrm>
             <a:off x="11503987" y="6343650"/>
-            <a:ext cx="211731" cy="133349"/>
-          </a:xfrm>
-          <a:prstGeom prst="rect">
-            <a:avLst/>
-          </a:prstGeom>
-          <a:noFill/>
-        </p:spPr>
-        <p:txBody>
-          <a:bodyPr wrap="none" lIns="0" rIns="0" tIns="0" bIns="0">
+            <a:ext cx="237131" cy="133349"/>
+          </a:xfrm>
+          <a:prstGeom prst="rect">
+            <a:avLst/>
+          </a:prstGeom>
+          <a:noFill/>
+        </p:spPr>
+        <p:txBody>
+          <a:bodyPr wrap="square" lIns="0" rIns="0" tIns="0" bIns="0">
             <a:spAutoFit/>
           </a:bodyPr>
           <a:lstStyle/>
@@ -5756,15 +5758,15 @@
         <p:spPr>
           <a:xfrm>
             <a:off x="11709370" y="6343650"/>
-            <a:ext cx="190498" cy="133349"/>
-          </a:xfrm>
-          <a:prstGeom prst="rect">
-            <a:avLst/>
-          </a:prstGeom>
-          <a:noFill/>
-        </p:spPr>
-        <p:txBody>
-          <a:bodyPr wrap="none" lIns="0" rIns="0" tIns="0" bIns="0">
+            <a:ext cx="215898" cy="133349"/>
+          </a:xfrm>
+          <a:prstGeom prst="rect">
+            <a:avLst/>
+          </a:prstGeom>
+          <a:noFill/>
+        </p:spPr>
+        <p:txBody>
+          <a:bodyPr wrap="square" lIns="0" rIns="0" tIns="0" bIns="0">
             <a:spAutoFit/>
           </a:bodyPr>
           <a:lstStyle/>
@@ -5793,15 +5795,15 @@
         <p:spPr>
           <a:xfrm>
             <a:off x="694033" y="6216054"/>
-            <a:ext cx="662977" cy="222250"/>
-          </a:xfrm>
-          <a:prstGeom prst="rect">
-            <a:avLst/>
-          </a:prstGeom>
-          <a:noFill/>
-        </p:spPr>
-        <p:txBody>
-          <a:bodyPr wrap="none" lIns="0" rIns="0" tIns="0" bIns="0">
+            <a:ext cx="721905" cy="237998"/>
+          </a:xfrm>
+          <a:prstGeom prst="rect">
+            <a:avLst/>
+          </a:prstGeom>
+          <a:noFill/>
+        </p:spPr>
+        <p:txBody>
+          <a:bodyPr wrap="square" lIns="0" rIns="0" tIns="0" bIns="0">
             <a:spAutoFit/>
           </a:bodyPr>
           <a:lstStyle/>
@@ -5892,7 +5894,7 @@
         </p:nvSpPr>
         <p:spPr>
           <a:xfrm>
-            <a:off x="406322" y="2949971"/>
+            <a:off x="406398" y="2949971"/>
             <a:ext cx="5613385" cy="1343124"/>
           </a:xfrm>
           <a:prstGeom prst="roundRect">
@@ -5901,7 +5903,9 @@
             </a:avLst>
           </a:prstGeom>
           <a:solidFill>
-            <a:srgbClr val="00A758"/>
+            <a:srgbClr val="00A758">
+              <a:alpha val="6000"/>
+            </a:srgbClr>
           </a:solidFill>
           <a:ln w="9525">
             <a:solidFill>
@@ -5939,7 +5943,7 @@
         </p:nvSpPr>
         <p:spPr>
           <a:xfrm>
-            <a:off x="565072" y="3108721"/>
+            <a:off x="565148" y="3108721"/>
             <a:ext cx="228599" cy="130770"/>
           </a:xfrm>
           <a:prstGeom prst="roundRect">
@@ -5984,8 +5988,8 @@
         </p:nvSpPr>
         <p:spPr>
           <a:xfrm>
-            <a:off x="6172107" y="2949971"/>
-            <a:ext cx="5613386" cy="1343124"/>
+            <a:off x="6172184" y="2949971"/>
+            <a:ext cx="5613385" cy="1343124"/>
           </a:xfrm>
           <a:prstGeom prst="roundRect">
             <a:avLst>
@@ -6031,7 +6035,7 @@
         </p:nvSpPr>
         <p:spPr>
           <a:xfrm>
-            <a:off x="6330857" y="3108721"/>
+            <a:off x="6330933" y="3108721"/>
             <a:ext cx="228599" cy="130770"/>
           </a:xfrm>
           <a:prstGeom prst="roundRect">
@@ -6158,7 +6162,7 @@
       </p:sp>
       <p:pic>
         <p:nvPicPr>
-          <p:cNvPr id="9" name="Picture 8" descr="img_4848265728.png"/>
+          <p:cNvPr id="9" name="Picture 8" descr="img_4463456448.png"/>
           <p:cNvPicPr>
             <a:picLocks noChangeAspect="1"/>
           </p:cNvPicPr>
@@ -6189,15 +6193,15 @@
         <p:spPr>
           <a:xfrm>
             <a:off x="406398" y="2232322"/>
-            <a:ext cx="631921" cy="133349"/>
-          </a:xfrm>
-          <a:prstGeom prst="rect">
-            <a:avLst/>
-          </a:prstGeom>
-          <a:noFill/>
-        </p:spPr>
-        <p:txBody>
-          <a:bodyPr wrap="none" lIns="0" rIns="0" tIns="0" bIns="0">
+            <a:ext cx="11455370" cy="133349"/>
+          </a:xfrm>
+          <a:prstGeom prst="rect">
+            <a:avLst/>
+          </a:prstGeom>
+          <a:noFill/>
+        </p:spPr>
+        <p:txBody>
+          <a:bodyPr wrap="square" lIns="0" rIns="0" tIns="0" bIns="0">
             <a:spAutoFit/>
           </a:bodyPr>
           <a:lstStyle/>
@@ -6226,15 +6230,15 @@
         <p:spPr>
           <a:xfrm>
             <a:off x="406398" y="2375991"/>
-            <a:ext cx="2628991" cy="393700"/>
-          </a:xfrm>
-          <a:prstGeom prst="rect">
-            <a:avLst/>
-          </a:prstGeom>
-          <a:noFill/>
-        </p:spPr>
-        <p:txBody>
-          <a:bodyPr wrap="none" lIns="0" rIns="0" tIns="0" bIns="0">
+            <a:ext cx="11582370" cy="444500"/>
+          </a:xfrm>
+          <a:prstGeom prst="rect">
+            <a:avLst/>
+          </a:prstGeom>
+          <a:noFill/>
+        </p:spPr>
+        <p:txBody>
+          <a:bodyPr wrap="square" lIns="0" rIns="0" tIns="0" bIns="0">
             <a:spAutoFit/>
           </a:bodyPr>
           <a:lstStyle/>
@@ -6266,16 +6270,16 @@
         </p:nvSpPr>
         <p:spPr>
           <a:xfrm>
-            <a:off x="603172" y="3120132"/>
-            <a:ext cx="266698" cy="133349"/>
-          </a:xfrm>
-          <a:prstGeom prst="rect">
-            <a:avLst/>
-          </a:prstGeom>
-          <a:noFill/>
-        </p:spPr>
-        <p:txBody>
-          <a:bodyPr wrap="none" lIns="0" rIns="0" tIns="0" bIns="0">
+            <a:off x="603248" y="3120132"/>
+            <a:ext cx="292098" cy="133349"/>
+          </a:xfrm>
+          <a:prstGeom prst="rect">
+            <a:avLst/>
+          </a:prstGeom>
+          <a:noFill/>
+        </p:spPr>
+        <p:txBody>
+          <a:bodyPr wrap="square" lIns="0" rIns="0" tIns="0" bIns="0">
             <a:spAutoFit/>
           </a:bodyPr>
           <a:lstStyle/>
@@ -6303,16 +6307,16 @@
         </p:nvSpPr>
         <p:spPr>
           <a:xfrm>
-            <a:off x="844471" y="3110607"/>
-            <a:ext cx="469898" cy="152400"/>
-          </a:xfrm>
-          <a:prstGeom prst="rect">
-            <a:avLst/>
-          </a:prstGeom>
-          <a:noFill/>
-        </p:spPr>
-        <p:txBody>
-          <a:bodyPr wrap="none" lIns="0" rIns="0" tIns="0" bIns="0">
+            <a:off x="844547" y="3110607"/>
+            <a:ext cx="5092686" cy="153670"/>
+          </a:xfrm>
+          <a:prstGeom prst="rect">
+            <a:avLst/>
+          </a:prstGeom>
+          <a:noFill/>
+        </p:spPr>
+        <p:txBody>
+          <a:bodyPr wrap="square" lIns="0" rIns="0" tIns="0" bIns="0">
             <a:spAutoFit/>
           </a:bodyPr>
           <a:lstStyle/>
@@ -6340,16 +6344,16 @@
         </p:nvSpPr>
         <p:spPr>
           <a:xfrm>
-            <a:off x="686912" y="3342282"/>
-            <a:ext cx="558797" cy="152400"/>
-          </a:xfrm>
-          <a:prstGeom prst="rect">
-            <a:avLst/>
-          </a:prstGeom>
-          <a:noFill/>
-        </p:spPr>
-        <p:txBody>
-          <a:bodyPr wrap="none" lIns="0" rIns="0" tIns="0" bIns="0">
+            <a:off x="686988" y="3342282"/>
+            <a:ext cx="5250245" cy="153670"/>
+          </a:xfrm>
+          <a:prstGeom prst="rect">
+            <a:avLst/>
+          </a:prstGeom>
+          <a:noFill/>
+        </p:spPr>
+        <p:txBody>
+          <a:bodyPr wrap="square" lIns="0" rIns="0" tIns="0" bIns="0">
             <a:spAutoFit/>
           </a:bodyPr>
           <a:lstStyle/>
@@ -6381,16 +6385,16 @@
         </p:nvSpPr>
         <p:spPr>
           <a:xfrm>
-            <a:off x="1131411" y="3342282"/>
-            <a:ext cx="802676" cy="152400"/>
-          </a:xfrm>
-          <a:prstGeom prst="rect">
-            <a:avLst/>
-          </a:prstGeom>
-          <a:noFill/>
-        </p:spPr>
-        <p:txBody>
-          <a:bodyPr wrap="none" lIns="0" rIns="0" tIns="0" bIns="0">
+            <a:off x="1131487" y="3342282"/>
+            <a:ext cx="4805746" cy="153670"/>
+          </a:xfrm>
+          <a:prstGeom prst="rect">
+            <a:avLst/>
+          </a:prstGeom>
+          <a:noFill/>
+        </p:spPr>
+        <p:txBody>
+          <a:bodyPr wrap="square" lIns="0" rIns="0" tIns="0" bIns="0">
             <a:spAutoFit/>
           </a:bodyPr>
           <a:lstStyle/>
@@ -6422,16 +6426,16 @@
         </p:nvSpPr>
         <p:spPr>
           <a:xfrm>
-            <a:off x="1819789" y="3342282"/>
-            <a:ext cx="469898" cy="152400"/>
-          </a:xfrm>
-          <a:prstGeom prst="rect">
-            <a:avLst/>
-          </a:prstGeom>
-          <a:noFill/>
-        </p:spPr>
-        <p:txBody>
-          <a:bodyPr wrap="none" lIns="0" rIns="0" tIns="0" bIns="0">
+            <a:off x="1819865" y="3342282"/>
+            <a:ext cx="4117368" cy="153670"/>
+          </a:xfrm>
+          <a:prstGeom prst="rect">
+            <a:avLst/>
+          </a:prstGeom>
+          <a:noFill/>
+        </p:spPr>
+        <p:txBody>
+          <a:bodyPr wrap="square" lIns="0" rIns="0" tIns="0" bIns="0">
             <a:spAutoFit/>
           </a:bodyPr>
           <a:lstStyle/>
@@ -6463,16 +6467,16 @@
         </p:nvSpPr>
         <p:spPr>
           <a:xfrm>
-            <a:off x="686912" y="3550443"/>
-            <a:ext cx="292098" cy="152400"/>
-          </a:xfrm>
-          <a:prstGeom prst="rect">
-            <a:avLst/>
-          </a:prstGeom>
-          <a:noFill/>
-        </p:spPr>
-        <p:txBody>
-          <a:bodyPr wrap="none" lIns="0" rIns="0" tIns="0" bIns="0">
+            <a:off x="686988" y="3550443"/>
+            <a:ext cx="5250245" cy="153670"/>
+          </a:xfrm>
+          <a:prstGeom prst="rect">
+            <a:avLst/>
+          </a:prstGeom>
+          <a:noFill/>
+        </p:spPr>
+        <p:txBody>
+          <a:bodyPr wrap="square" lIns="0" rIns="0" tIns="0" bIns="0">
             <a:spAutoFit/>
           </a:bodyPr>
           <a:lstStyle/>
@@ -6504,16 +6508,16 @@
         </p:nvSpPr>
         <p:spPr>
           <a:xfrm>
-            <a:off x="864712" y="3550443"/>
-            <a:ext cx="292098" cy="152400"/>
-          </a:xfrm>
-          <a:prstGeom prst="rect">
-            <a:avLst/>
-          </a:prstGeom>
-          <a:noFill/>
-        </p:spPr>
-        <p:txBody>
-          <a:bodyPr wrap="none" lIns="0" rIns="0" tIns="0" bIns="0">
+            <a:off x="864788" y="3550443"/>
+            <a:ext cx="5072445" cy="153670"/>
+          </a:xfrm>
+          <a:prstGeom prst="rect">
+            <a:avLst/>
+          </a:prstGeom>
+          <a:noFill/>
+        </p:spPr>
+        <p:txBody>
+          <a:bodyPr wrap="square" lIns="0" rIns="0" tIns="0" bIns="0">
             <a:spAutoFit/>
           </a:bodyPr>
           <a:lstStyle/>
@@ -6545,16 +6549,16 @@
         </p:nvSpPr>
         <p:spPr>
           <a:xfrm>
-            <a:off x="1042511" y="3550443"/>
-            <a:ext cx="647697" cy="152400"/>
-          </a:xfrm>
-          <a:prstGeom prst="rect">
-            <a:avLst/>
-          </a:prstGeom>
-          <a:noFill/>
-        </p:spPr>
-        <p:txBody>
-          <a:bodyPr wrap="none" lIns="0" rIns="0" tIns="0" bIns="0">
+            <a:off x="1042587" y="3550443"/>
+            <a:ext cx="4894646" cy="153670"/>
+          </a:xfrm>
+          <a:prstGeom prst="rect">
+            <a:avLst/>
+          </a:prstGeom>
+          <a:noFill/>
+        </p:spPr>
+        <p:txBody>
+          <a:bodyPr wrap="square" lIns="0" rIns="0" tIns="0" bIns="0">
             <a:spAutoFit/>
           </a:bodyPr>
           <a:lstStyle/>
@@ -6586,16 +6590,16 @@
         </p:nvSpPr>
         <p:spPr>
           <a:xfrm>
-            <a:off x="686912" y="3758604"/>
-            <a:ext cx="1625595" cy="152400"/>
-          </a:xfrm>
-          <a:prstGeom prst="rect">
-            <a:avLst/>
-          </a:prstGeom>
-          <a:noFill/>
-        </p:spPr>
-        <p:txBody>
-          <a:bodyPr wrap="none" lIns="0" rIns="0" tIns="0" bIns="0">
+            <a:off x="686988" y="3758604"/>
+            <a:ext cx="5250245" cy="153670"/>
+          </a:xfrm>
+          <a:prstGeom prst="rect">
+            <a:avLst/>
+          </a:prstGeom>
+          <a:noFill/>
+        </p:spPr>
+        <p:txBody>
+          <a:bodyPr wrap="square" lIns="0" rIns="0" tIns="0" bIns="0">
             <a:spAutoFit/>
           </a:bodyPr>
           <a:lstStyle/>
@@ -6627,16 +6631,16 @@
         </p:nvSpPr>
         <p:spPr>
           <a:xfrm>
-            <a:off x="686912" y="3966765"/>
-            <a:ext cx="1714494" cy="152400"/>
-          </a:xfrm>
-          <a:prstGeom prst="rect">
-            <a:avLst/>
-          </a:prstGeom>
-          <a:noFill/>
-        </p:spPr>
-        <p:txBody>
-          <a:bodyPr wrap="none" lIns="0" rIns="0" tIns="0" bIns="0">
+            <a:off x="686988" y="3966765"/>
+            <a:ext cx="5250245" cy="153670"/>
+          </a:xfrm>
+          <a:prstGeom prst="rect">
+            <a:avLst/>
+          </a:prstGeom>
+          <a:noFill/>
+        </p:spPr>
+        <p:txBody>
+          <a:bodyPr wrap="square" lIns="0" rIns="0" tIns="0" bIns="0">
             <a:spAutoFit/>
           </a:bodyPr>
           <a:lstStyle/>
@@ -6668,16 +6672,16 @@
         </p:nvSpPr>
         <p:spPr>
           <a:xfrm>
-            <a:off x="6368957" y="3120132"/>
-            <a:ext cx="266699" cy="133349"/>
-          </a:xfrm>
-          <a:prstGeom prst="rect">
-            <a:avLst/>
-          </a:prstGeom>
-          <a:noFill/>
-        </p:spPr>
-        <p:txBody>
-          <a:bodyPr wrap="none" lIns="0" rIns="0" tIns="0" bIns="0">
+            <a:off x="6369033" y="3120132"/>
+            <a:ext cx="292098" cy="133349"/>
+          </a:xfrm>
+          <a:prstGeom prst="rect">
+            <a:avLst/>
+          </a:prstGeom>
+          <a:noFill/>
+        </p:spPr>
+        <p:txBody>
+          <a:bodyPr wrap="square" lIns="0" rIns="0" tIns="0" bIns="0">
             <a:spAutoFit/>
           </a:bodyPr>
           <a:lstStyle/>
@@ -6705,16 +6709,16 @@
         </p:nvSpPr>
         <p:spPr>
           <a:xfrm>
-            <a:off x="6610257" y="3110607"/>
-            <a:ext cx="469898" cy="152400"/>
-          </a:xfrm>
-          <a:prstGeom prst="rect">
-            <a:avLst/>
-          </a:prstGeom>
-          <a:noFill/>
-        </p:spPr>
-        <p:txBody>
-          <a:bodyPr wrap="none" lIns="0" rIns="0" tIns="0" bIns="0">
+            <a:off x="6610333" y="3110607"/>
+            <a:ext cx="5092686" cy="153670"/>
+          </a:xfrm>
+          <a:prstGeom prst="rect">
+            <a:avLst/>
+          </a:prstGeom>
+          <a:noFill/>
+        </p:spPr>
+        <p:txBody>
+          <a:bodyPr wrap="square" lIns="0" rIns="0" tIns="0" bIns="0">
             <a:spAutoFit/>
           </a:bodyPr>
           <a:lstStyle/>
@@ -6742,16 +6746,16 @@
         </p:nvSpPr>
         <p:spPr>
           <a:xfrm>
-            <a:off x="6452697" y="3342282"/>
-            <a:ext cx="1710427" cy="152400"/>
-          </a:xfrm>
-          <a:prstGeom prst="rect">
-            <a:avLst/>
-          </a:prstGeom>
-          <a:noFill/>
-        </p:spPr>
-        <p:txBody>
-          <a:bodyPr wrap="none" lIns="0" rIns="0" tIns="0" bIns="0">
+            <a:off x="6452774" y="3342282"/>
+            <a:ext cx="5250245" cy="153670"/>
+          </a:xfrm>
+          <a:prstGeom prst="rect">
+            <a:avLst/>
+          </a:prstGeom>
+          <a:noFill/>
+        </p:spPr>
+        <p:txBody>
+          <a:bodyPr wrap="square" lIns="0" rIns="0" tIns="0" bIns="0">
             <a:spAutoFit/>
           </a:bodyPr>
           <a:lstStyle/>
@@ -6783,16 +6787,16 @@
         </p:nvSpPr>
         <p:spPr>
           <a:xfrm>
-            <a:off x="6452697" y="3550443"/>
-            <a:ext cx="1358896" cy="152400"/>
-          </a:xfrm>
-          <a:prstGeom prst="rect">
-            <a:avLst/>
-          </a:prstGeom>
-          <a:noFill/>
-        </p:spPr>
-        <p:txBody>
-          <a:bodyPr wrap="none" lIns="0" rIns="0" tIns="0" bIns="0">
+            <a:off x="6452774" y="3550443"/>
+            <a:ext cx="5250245" cy="153670"/>
+          </a:xfrm>
+          <a:prstGeom prst="rect">
+            <a:avLst/>
+          </a:prstGeom>
+          <a:noFill/>
+        </p:spPr>
+        <p:txBody>
+          <a:bodyPr wrap="square" lIns="0" rIns="0" tIns="0" bIns="0">
             <a:spAutoFit/>
           </a:bodyPr>
           <a:lstStyle/>
@@ -6824,16 +6828,16 @@
         </p:nvSpPr>
         <p:spPr>
           <a:xfrm>
-            <a:off x="6452697" y="3758604"/>
-            <a:ext cx="1358896" cy="152400"/>
-          </a:xfrm>
-          <a:prstGeom prst="rect">
-            <a:avLst/>
-          </a:prstGeom>
-          <a:noFill/>
-        </p:spPr>
-        <p:txBody>
-          <a:bodyPr wrap="none" lIns="0" rIns="0" tIns="0" bIns="0">
+            <a:off x="6452774" y="3758604"/>
+            <a:ext cx="5250245" cy="153670"/>
+          </a:xfrm>
+          <a:prstGeom prst="rect">
+            <a:avLst/>
+          </a:prstGeom>
+          <a:noFill/>
+        </p:spPr>
+        <p:txBody>
+          <a:bodyPr wrap="square" lIns="0" rIns="0" tIns="0" bIns="0">
             <a:spAutoFit/>
           </a:bodyPr>
           <a:lstStyle/>
@@ -6865,16 +6869,16 @@
         </p:nvSpPr>
         <p:spPr>
           <a:xfrm>
-            <a:off x="6452697" y="3966765"/>
-            <a:ext cx="1447795" cy="152400"/>
-          </a:xfrm>
-          <a:prstGeom prst="rect">
-            <a:avLst/>
-          </a:prstGeom>
-          <a:noFill/>
-        </p:spPr>
-        <p:txBody>
-          <a:bodyPr wrap="none" lIns="0" rIns="0" tIns="0" bIns="0">
+            <a:off x="6452774" y="3966765"/>
+            <a:ext cx="5250245" cy="153670"/>
+          </a:xfrm>
+          <a:prstGeom prst="rect">
+            <a:avLst/>
+          </a:prstGeom>
+          <a:noFill/>
+        </p:spPr>
+        <p:txBody>
+          <a:bodyPr wrap="square" lIns="0" rIns="0" tIns="0" bIns="0">
             <a:spAutoFit/>
           </a:bodyPr>
           <a:lstStyle/>
@@ -6907,15 +6911,15 @@
         <p:spPr>
           <a:xfrm>
             <a:off x="507998" y="4464446"/>
-            <a:ext cx="2247893" cy="152400"/>
-          </a:xfrm>
-          <a:prstGeom prst="rect">
-            <a:avLst/>
-          </a:prstGeom>
-          <a:noFill/>
-        </p:spPr>
-        <p:txBody>
-          <a:bodyPr wrap="none" lIns="0" rIns="0" tIns="0" bIns="0">
+            <a:ext cx="11353770" cy="153670"/>
+          </a:xfrm>
+          <a:prstGeom prst="rect">
+            <a:avLst/>
+          </a:prstGeom>
+          <a:noFill/>
+        </p:spPr>
+        <p:txBody>
+          <a:bodyPr wrap="square" lIns="0" rIns="0" tIns="0" bIns="0">
             <a:spAutoFit/>
           </a:bodyPr>
           <a:lstStyle/>
@@ -6944,15 +6948,15 @@
         <p:spPr>
           <a:xfrm>
             <a:off x="11504980" y="6343650"/>
-            <a:ext cx="210739" cy="133349"/>
-          </a:xfrm>
-          <a:prstGeom prst="rect">
-            <a:avLst/>
-          </a:prstGeom>
-          <a:noFill/>
-        </p:spPr>
-        <p:txBody>
-          <a:bodyPr wrap="none" lIns="0" rIns="0" tIns="0" bIns="0">
+            <a:ext cx="236139" cy="133349"/>
+          </a:xfrm>
+          <a:prstGeom prst="rect">
+            <a:avLst/>
+          </a:prstGeom>
+          <a:noFill/>
+        </p:spPr>
+        <p:txBody>
+          <a:bodyPr wrap="square" lIns="0" rIns="0" tIns="0" bIns="0">
             <a:spAutoFit/>
           </a:bodyPr>
           <a:lstStyle/>
@@ -6981,15 +6985,15 @@
         <p:spPr>
           <a:xfrm>
             <a:off x="11709370" y="6343650"/>
-            <a:ext cx="190498" cy="133349"/>
-          </a:xfrm>
-          <a:prstGeom prst="rect">
-            <a:avLst/>
-          </a:prstGeom>
-          <a:noFill/>
-        </p:spPr>
-        <p:txBody>
-          <a:bodyPr wrap="none" lIns="0" rIns="0" tIns="0" bIns="0">
+            <a:ext cx="215898" cy="133349"/>
+          </a:xfrm>
+          <a:prstGeom prst="rect">
+            <a:avLst/>
+          </a:prstGeom>
+          <a:noFill/>
+        </p:spPr>
+        <p:txBody>
+          <a:bodyPr wrap="square" lIns="0" rIns="0" tIns="0" bIns="0">
             <a:spAutoFit/>
           </a:bodyPr>
           <a:lstStyle/>
@@ -7018,15 +7022,15 @@
         <p:spPr>
           <a:xfrm>
             <a:off x="694033" y="6216054"/>
-            <a:ext cx="662977" cy="222250"/>
-          </a:xfrm>
-          <a:prstGeom prst="rect">
-            <a:avLst/>
-          </a:prstGeom>
-          <a:noFill/>
-        </p:spPr>
-        <p:txBody>
-          <a:bodyPr wrap="none" lIns="0" rIns="0" tIns="0" bIns="0">
+            <a:ext cx="721905" cy="237998"/>
+          </a:xfrm>
+          <a:prstGeom prst="rect">
+            <a:avLst/>
+          </a:prstGeom>
+          <a:noFill/>
+        </p:spPr>
+        <p:txBody>
+          <a:bodyPr wrap="square" lIns="0" rIns="0" tIns="0" bIns="0">
             <a:spAutoFit/>
           </a:bodyPr>
           <a:lstStyle/>
@@ -7117,7 +7121,7 @@
         </p:nvSpPr>
         <p:spPr>
           <a:xfrm>
-            <a:off x="406281" y="3347839"/>
+            <a:off x="406398" y="3347839"/>
             <a:ext cx="304799" cy="304800"/>
           </a:xfrm>
           <a:prstGeom prst="roundRect">
@@ -7162,7 +7166,7 @@
         </p:nvSpPr>
         <p:spPr>
           <a:xfrm>
-            <a:off x="4233139" y="3347839"/>
+            <a:off x="4233256" y="3347839"/>
             <a:ext cx="304799" cy="304800"/>
           </a:xfrm>
           <a:prstGeom prst="roundRect">
@@ -7207,7 +7211,7 @@
         </p:nvSpPr>
         <p:spPr>
           <a:xfrm>
-            <a:off x="8060096" y="3347839"/>
+            <a:off x="8060213" y="3347839"/>
             <a:ext cx="304799" cy="304800"/>
           </a:xfrm>
           <a:prstGeom prst="roundRect">
@@ -7303,7 +7307,7 @@
         </p:blipFill>
         <p:spPr>
           <a:xfrm>
-            <a:off x="482481" y="3424039"/>
+            <a:off x="482598" y="3424039"/>
             <a:ext cx="152399" cy="152400"/>
           </a:xfrm>
           <a:prstGeom prst="rect">
@@ -7327,7 +7331,7 @@
         </p:blipFill>
         <p:spPr>
           <a:xfrm>
-            <a:off x="4309339" y="3424039"/>
+            <a:off x="4309456" y="3424039"/>
             <a:ext cx="152399" cy="152400"/>
           </a:xfrm>
           <a:prstGeom prst="rect">
@@ -7351,7 +7355,7 @@
         </p:blipFill>
         <p:spPr>
           <a:xfrm>
-            <a:off x="8136295" y="3424039"/>
+            <a:off x="8136412" y="3424039"/>
             <a:ext cx="152399" cy="152400"/>
           </a:xfrm>
           <a:prstGeom prst="rect">
@@ -7361,7 +7365,7 @@
       </p:pic>
       <p:pic>
         <p:nvPicPr>
-          <p:cNvPr id="10" name="Picture 9" descr="img_4848265728.png"/>
+          <p:cNvPr id="10" name="Picture 9" descr="img_4463456448.png"/>
           <p:cNvPicPr>
             <a:picLocks noChangeAspect="1"/>
           </p:cNvPicPr>
@@ -7392,15 +7396,15 @@
         <p:spPr>
           <a:xfrm>
             <a:off x="406398" y="2493069"/>
-            <a:ext cx="634005" cy="133349"/>
-          </a:xfrm>
-          <a:prstGeom prst="rect">
-            <a:avLst/>
-          </a:prstGeom>
-          <a:noFill/>
-        </p:spPr>
-        <p:txBody>
-          <a:bodyPr wrap="none" lIns="0" rIns="0" tIns="0" bIns="0">
+            <a:ext cx="11455370" cy="133349"/>
+          </a:xfrm>
+          <a:prstGeom prst="rect">
+            <a:avLst/>
+          </a:prstGeom>
+          <a:noFill/>
+        </p:spPr>
+        <p:txBody>
+          <a:bodyPr wrap="square" lIns="0" rIns="0" tIns="0" bIns="0">
             <a:spAutoFit/>
           </a:bodyPr>
           <a:lstStyle/>
@@ -7429,15 +7433,15 @@
         <p:spPr>
           <a:xfrm>
             <a:off x="406398" y="2636738"/>
-            <a:ext cx="3790046" cy="393700"/>
-          </a:xfrm>
-          <a:prstGeom prst="rect">
-            <a:avLst/>
-          </a:prstGeom>
-          <a:noFill/>
-        </p:spPr>
-        <p:txBody>
-          <a:bodyPr wrap="none" lIns="0" rIns="0" tIns="0" bIns="0">
+            <a:ext cx="11582370" cy="444500"/>
+          </a:xfrm>
+          <a:prstGeom prst="rect">
+            <a:avLst/>
+          </a:prstGeom>
+          <a:noFill/>
+        </p:spPr>
+        <p:txBody>
+          <a:bodyPr wrap="square" lIns="0" rIns="0" tIns="0" bIns="0">
             <a:spAutoFit/>
           </a:bodyPr>
           <a:lstStyle/>
@@ -7469,16 +7473,16 @@
         </p:nvSpPr>
         <p:spPr>
           <a:xfrm>
-            <a:off x="812680" y="3335139"/>
-            <a:ext cx="1015302" cy="279400"/>
-          </a:xfrm>
-          <a:prstGeom prst="rect">
-            <a:avLst/>
-          </a:prstGeom>
-          <a:noFill/>
-        </p:spPr>
-        <p:txBody>
-          <a:bodyPr wrap="none" lIns="0" rIns="0" tIns="0" bIns="0">
+            <a:off x="812797" y="3335139"/>
+            <a:ext cx="2747716" cy="307340"/>
+          </a:xfrm>
+          <a:prstGeom prst="rect">
+            <a:avLst/>
+          </a:prstGeom>
+          <a:noFill/>
+        </p:spPr>
+        <p:txBody>
+          <a:bodyPr wrap="square" lIns="0" rIns="0" tIns="0" bIns="0">
             <a:spAutoFit/>
           </a:bodyPr>
           <a:lstStyle/>
@@ -7510,16 +7514,16 @@
         </p:nvSpPr>
         <p:spPr>
           <a:xfrm>
-            <a:off x="812680" y="3605510"/>
-            <a:ext cx="1536695" cy="152400"/>
-          </a:xfrm>
-          <a:prstGeom prst="rect">
-            <a:avLst/>
-          </a:prstGeom>
-          <a:noFill/>
-        </p:spPr>
-        <p:txBody>
-          <a:bodyPr wrap="none" lIns="0" rIns="0" tIns="0" bIns="0">
+            <a:off x="812797" y="3605510"/>
+            <a:ext cx="2681676" cy="153670"/>
+          </a:xfrm>
+          <a:prstGeom prst="rect">
+            <a:avLst/>
+          </a:prstGeom>
+          <a:noFill/>
+        </p:spPr>
+        <p:txBody>
+          <a:bodyPr wrap="square" lIns="0" rIns="0" tIns="0" bIns="0">
             <a:spAutoFit/>
           </a:bodyPr>
           <a:lstStyle/>
@@ -7551,16 +7555,16 @@
         </p:nvSpPr>
         <p:spPr>
           <a:xfrm>
-            <a:off x="2235077" y="3605510"/>
-            <a:ext cx="572490" cy="152400"/>
-          </a:xfrm>
-          <a:prstGeom prst="rect">
-            <a:avLst/>
-          </a:prstGeom>
-          <a:noFill/>
-        </p:spPr>
-        <p:txBody>
-          <a:bodyPr wrap="none" lIns="0" rIns="0" tIns="0" bIns="0">
+            <a:off x="2235194" y="3605510"/>
+            <a:ext cx="1259280" cy="153670"/>
+          </a:xfrm>
+          <a:prstGeom prst="rect">
+            <a:avLst/>
+          </a:prstGeom>
+          <a:noFill/>
+        </p:spPr>
+        <p:txBody>
+          <a:bodyPr wrap="square" lIns="0" rIns="0" tIns="0" bIns="0">
             <a:spAutoFit/>
           </a:bodyPr>
           <a:lstStyle/>
@@ -7592,16 +7596,16 @@
         </p:nvSpPr>
         <p:spPr>
           <a:xfrm>
-            <a:off x="2693268" y="3605510"/>
-            <a:ext cx="380998" cy="152400"/>
-          </a:xfrm>
-          <a:prstGeom prst="rect">
-            <a:avLst/>
-          </a:prstGeom>
-          <a:noFill/>
-        </p:spPr>
-        <p:txBody>
-          <a:bodyPr wrap="none" lIns="0" rIns="0" tIns="0" bIns="0">
+            <a:off x="2693385" y="3605510"/>
+            <a:ext cx="801089" cy="153670"/>
+          </a:xfrm>
+          <a:prstGeom prst="rect">
+            <a:avLst/>
+          </a:prstGeom>
+          <a:noFill/>
+        </p:spPr>
+        <p:txBody>
+          <a:bodyPr wrap="square" lIns="0" rIns="0" tIns="0" bIns="0">
             <a:spAutoFit/>
           </a:bodyPr>
           <a:lstStyle/>
@@ -7633,16 +7637,16 @@
         </p:nvSpPr>
         <p:spPr>
           <a:xfrm>
-            <a:off x="2959967" y="3605510"/>
-            <a:ext cx="572490" cy="152400"/>
-          </a:xfrm>
-          <a:prstGeom prst="rect">
-            <a:avLst/>
-          </a:prstGeom>
-          <a:noFill/>
-        </p:spPr>
-        <p:txBody>
-          <a:bodyPr wrap="none" lIns="0" rIns="0" tIns="0" bIns="0">
+            <a:off x="2960084" y="3605510"/>
+            <a:ext cx="597889" cy="153670"/>
+          </a:xfrm>
+          <a:prstGeom prst="rect">
+            <a:avLst/>
+          </a:prstGeom>
+          <a:noFill/>
+        </p:spPr>
+        <p:txBody>
+          <a:bodyPr wrap="square" lIns="0" rIns="0" tIns="0" bIns="0">
             <a:spAutoFit/>
           </a:bodyPr>
           <a:lstStyle/>
@@ -7674,16 +7678,16 @@
         </p:nvSpPr>
         <p:spPr>
           <a:xfrm>
-            <a:off x="4639538" y="3335139"/>
-            <a:ext cx="825497" cy="279400"/>
-          </a:xfrm>
-          <a:prstGeom prst="rect">
-            <a:avLst/>
-          </a:prstGeom>
-          <a:noFill/>
-        </p:spPr>
-        <p:txBody>
-          <a:bodyPr wrap="none" lIns="0" rIns="0" tIns="0" bIns="0">
+            <a:off x="4639655" y="3335139"/>
+            <a:ext cx="1831334" cy="307340"/>
+          </a:xfrm>
+          <a:prstGeom prst="rect">
+            <a:avLst/>
+          </a:prstGeom>
+          <a:noFill/>
+        </p:spPr>
+        <p:txBody>
+          <a:bodyPr wrap="square" lIns="0" rIns="0" tIns="0" bIns="0">
             <a:spAutoFit/>
           </a:bodyPr>
           <a:lstStyle/>
@@ -7715,16 +7719,16 @@
         </p:nvSpPr>
         <p:spPr>
           <a:xfrm>
-            <a:off x="4639538" y="3605510"/>
-            <a:ext cx="1358895" cy="152400"/>
-          </a:xfrm>
-          <a:prstGeom prst="rect">
-            <a:avLst/>
-          </a:prstGeom>
-          <a:noFill/>
-        </p:spPr>
-        <p:txBody>
-          <a:bodyPr wrap="none" lIns="0" rIns="0" tIns="0" bIns="0">
+            <a:off x="4639655" y="3605510"/>
+            <a:ext cx="1765294" cy="153670"/>
+          </a:xfrm>
+          <a:prstGeom prst="rect">
+            <a:avLst/>
+          </a:prstGeom>
+          <a:noFill/>
+        </p:spPr>
+        <p:txBody>
+          <a:bodyPr wrap="square" lIns="0" rIns="0" tIns="0" bIns="0">
             <a:spAutoFit/>
           </a:bodyPr>
           <a:lstStyle/>
@@ -7756,16 +7760,16 @@
         </p:nvSpPr>
         <p:spPr>
           <a:xfrm>
-            <a:off x="5884135" y="3605510"/>
-            <a:ext cx="380998" cy="152400"/>
-          </a:xfrm>
-          <a:prstGeom prst="rect">
-            <a:avLst/>
-          </a:prstGeom>
-          <a:noFill/>
-        </p:spPr>
-        <p:txBody>
-          <a:bodyPr wrap="none" lIns="0" rIns="0" tIns="0" bIns="0">
+            <a:off x="5884252" y="3605510"/>
+            <a:ext cx="520697" cy="153670"/>
+          </a:xfrm>
+          <a:prstGeom prst="rect">
+            <a:avLst/>
+          </a:prstGeom>
+          <a:noFill/>
+        </p:spPr>
+        <p:txBody>
+          <a:bodyPr wrap="square" lIns="0" rIns="0" tIns="0" bIns="0">
             <a:spAutoFit/>
           </a:bodyPr>
           <a:lstStyle/>
@@ -7797,16 +7801,16 @@
         </p:nvSpPr>
         <p:spPr>
           <a:xfrm>
-            <a:off x="6150834" y="3605510"/>
-            <a:ext cx="292098" cy="152400"/>
-          </a:xfrm>
-          <a:prstGeom prst="rect">
-            <a:avLst/>
-          </a:prstGeom>
-          <a:noFill/>
-        </p:spPr>
-        <p:txBody>
-          <a:bodyPr wrap="none" lIns="0" rIns="0" tIns="0" bIns="0">
+            <a:off x="6150951" y="3605510"/>
+            <a:ext cx="317498" cy="153670"/>
+          </a:xfrm>
+          <a:prstGeom prst="rect">
+            <a:avLst/>
+          </a:prstGeom>
+          <a:noFill/>
+        </p:spPr>
+        <p:txBody>
+          <a:bodyPr wrap="square" lIns="0" rIns="0" tIns="0" bIns="0">
             <a:spAutoFit/>
           </a:bodyPr>
           <a:lstStyle/>
@@ -7838,16 +7842,16 @@
         </p:nvSpPr>
         <p:spPr>
           <a:xfrm>
-            <a:off x="8466495" y="3335139"/>
-            <a:ext cx="1003296" cy="279400"/>
-          </a:xfrm>
-          <a:prstGeom prst="rect">
-            <a:avLst/>
-          </a:prstGeom>
-          <a:noFill/>
-        </p:spPr>
-        <p:txBody>
-          <a:bodyPr wrap="none" lIns="0" rIns="0" tIns="0" bIns="0">
+            <a:off x="8466612" y="3335139"/>
+            <a:ext cx="1475735" cy="307340"/>
+          </a:xfrm>
+          <a:prstGeom prst="rect">
+            <a:avLst/>
+          </a:prstGeom>
+          <a:noFill/>
+        </p:spPr>
+        <p:txBody>
+          <a:bodyPr wrap="square" lIns="0" rIns="0" tIns="0" bIns="0">
             <a:spAutoFit/>
           </a:bodyPr>
           <a:lstStyle/>
@@ -7879,16 +7883,16 @@
         </p:nvSpPr>
         <p:spPr>
           <a:xfrm>
-            <a:off x="8466495" y="3605510"/>
-            <a:ext cx="736597" cy="152400"/>
-          </a:xfrm>
-          <a:prstGeom prst="rect">
-            <a:avLst/>
-          </a:prstGeom>
-          <a:noFill/>
-        </p:spPr>
-        <p:txBody>
-          <a:bodyPr wrap="none" lIns="0" rIns="0" tIns="0" bIns="0">
+            <a:off x="8466612" y="3605510"/>
+            <a:ext cx="1409695" cy="153670"/>
+          </a:xfrm>
+          <a:prstGeom prst="rect">
+            <a:avLst/>
+          </a:prstGeom>
+          <a:noFill/>
+        </p:spPr>
+        <p:txBody>
+          <a:bodyPr wrap="square" lIns="0" rIns="0" tIns="0" bIns="0">
             <a:spAutoFit/>
           </a:bodyPr>
           <a:lstStyle/>
@@ -7920,16 +7924,16 @@
         </p:nvSpPr>
         <p:spPr>
           <a:xfrm>
-            <a:off x="9088793" y="3605510"/>
-            <a:ext cx="469898" cy="152400"/>
-          </a:xfrm>
-          <a:prstGeom prst="rect">
-            <a:avLst/>
-          </a:prstGeom>
-          <a:noFill/>
-        </p:spPr>
-        <p:txBody>
-          <a:bodyPr wrap="none" lIns="0" rIns="0" tIns="0" bIns="0">
+            <a:off x="9088910" y="3605510"/>
+            <a:ext cx="787397" cy="153670"/>
+          </a:xfrm>
+          <a:prstGeom prst="rect">
+            <a:avLst/>
+          </a:prstGeom>
+          <a:noFill/>
+        </p:spPr>
+        <p:txBody>
+          <a:bodyPr wrap="square" lIns="0" rIns="0" tIns="0" bIns="0">
             <a:spAutoFit/>
           </a:bodyPr>
           <a:lstStyle/>
@@ -7961,16 +7965,16 @@
         </p:nvSpPr>
         <p:spPr>
           <a:xfrm>
-            <a:off x="9444392" y="3605510"/>
-            <a:ext cx="469898" cy="152400"/>
-          </a:xfrm>
-          <a:prstGeom prst="rect">
-            <a:avLst/>
-          </a:prstGeom>
-          <a:noFill/>
-        </p:spPr>
-        <p:txBody>
-          <a:bodyPr wrap="none" lIns="0" rIns="0" tIns="0" bIns="0">
+            <a:off x="9444509" y="3605510"/>
+            <a:ext cx="495297" cy="153670"/>
+          </a:xfrm>
+          <a:prstGeom prst="rect">
+            <a:avLst/>
+          </a:prstGeom>
+          <a:noFill/>
+        </p:spPr>
+        <p:txBody>
+          <a:bodyPr wrap="square" lIns="0" rIns="0" tIns="0" bIns="0">
             <a:spAutoFit/>
           </a:bodyPr>
           <a:lstStyle/>
@@ -8002,16 +8006,16 @@
         </p:nvSpPr>
         <p:spPr>
           <a:xfrm>
-            <a:off x="5139915" y="3891260"/>
-            <a:ext cx="2026437" cy="374650"/>
-          </a:xfrm>
-          <a:prstGeom prst="rect">
-            <a:avLst/>
-          </a:prstGeom>
-          <a:noFill/>
-        </p:spPr>
-        <p:txBody>
-          <a:bodyPr wrap="none" lIns="0" rIns="0" tIns="0" bIns="0">
+            <a:off x="406398" y="3891260"/>
+            <a:ext cx="11582370" cy="425450"/>
+          </a:xfrm>
+          <a:prstGeom prst="rect">
+            <a:avLst/>
+          </a:prstGeom>
+          <a:noFill/>
+        </p:spPr>
+        <p:txBody>
+          <a:bodyPr wrap="square" lIns="0" rIns="0" tIns="0" bIns="0">
             <a:spAutoFit/>
           </a:bodyPr>
           <a:lstStyle/>
@@ -8043,16 +8047,16 @@
         </p:nvSpPr>
         <p:spPr>
           <a:xfrm>
-            <a:off x="5073637" y="4229000"/>
-            <a:ext cx="2158993" cy="152400"/>
-          </a:xfrm>
-          <a:prstGeom prst="rect">
-            <a:avLst/>
-          </a:prstGeom>
-          <a:noFill/>
-        </p:spPr>
-        <p:txBody>
-          <a:bodyPr wrap="none" lIns="0" rIns="0" tIns="0" bIns="0">
+            <a:off x="406398" y="4229000"/>
+            <a:ext cx="11455370" cy="153670"/>
+          </a:xfrm>
+          <a:prstGeom prst="rect">
+            <a:avLst/>
+          </a:prstGeom>
+          <a:noFill/>
+        </p:spPr>
+        <p:txBody>
+          <a:bodyPr wrap="square" lIns="0" rIns="0" tIns="0" bIns="0">
             <a:spAutoFit/>
           </a:bodyPr>
           <a:lstStyle/>
@@ -8085,15 +8089,15 @@
         <p:spPr>
           <a:xfrm>
             <a:off x="11503194" y="6343650"/>
-            <a:ext cx="212525" cy="133349"/>
-          </a:xfrm>
-          <a:prstGeom prst="rect">
-            <a:avLst/>
-          </a:prstGeom>
-          <a:noFill/>
-        </p:spPr>
-        <p:txBody>
-          <a:bodyPr wrap="none" lIns="0" rIns="0" tIns="0" bIns="0">
+            <a:ext cx="237925" cy="133349"/>
+          </a:xfrm>
+          <a:prstGeom prst="rect">
+            <a:avLst/>
+          </a:prstGeom>
+          <a:noFill/>
+        </p:spPr>
+        <p:txBody>
+          <a:bodyPr wrap="square" lIns="0" rIns="0" tIns="0" bIns="0">
             <a:spAutoFit/>
           </a:bodyPr>
           <a:lstStyle/>
@@ -8122,15 +8126,15 @@
         <p:spPr>
           <a:xfrm>
             <a:off x="11709370" y="6343650"/>
-            <a:ext cx="190498" cy="133349"/>
-          </a:xfrm>
-          <a:prstGeom prst="rect">
-            <a:avLst/>
-          </a:prstGeom>
-          <a:noFill/>
-        </p:spPr>
-        <p:txBody>
-          <a:bodyPr wrap="none" lIns="0" rIns="0" tIns="0" bIns="0">
+            <a:ext cx="215898" cy="133349"/>
+          </a:xfrm>
+          <a:prstGeom prst="rect">
+            <a:avLst/>
+          </a:prstGeom>
+          <a:noFill/>
+        </p:spPr>
+        <p:txBody>
+          <a:bodyPr wrap="square" lIns="0" rIns="0" tIns="0" bIns="0">
             <a:spAutoFit/>
           </a:bodyPr>
           <a:lstStyle/>
@@ -8159,15 +8163,15 @@
         <p:spPr>
           <a:xfrm>
             <a:off x="694033" y="6216054"/>
-            <a:ext cx="662977" cy="222250"/>
-          </a:xfrm>
-          <a:prstGeom prst="rect">
-            <a:avLst/>
-          </a:prstGeom>
-          <a:noFill/>
-        </p:spPr>
-        <p:txBody>
-          <a:bodyPr wrap="none" lIns="0" rIns="0" tIns="0" bIns="0">
+            <a:ext cx="721905" cy="237998"/>
+          </a:xfrm>
+          <a:prstGeom prst="rect">
+            <a:avLst/>
+          </a:prstGeom>
+          <a:noFill/>
+        </p:spPr>
+        <p:txBody>
+          <a:bodyPr wrap="square" lIns="0" rIns="0" tIns="0" bIns="0">
             <a:spAutoFit/>
           </a:bodyPr>
           <a:lstStyle/>
@@ -8312,7 +8316,9 @@
             </a:avLst>
           </a:prstGeom>
           <a:solidFill>
-            <a:srgbClr val="1E3A5F"/>
+            <a:srgbClr val="1E3A5F">
+              <a:alpha val="8000"/>
+            </a:srgbClr>
           </a:solidFill>
           <a:ln>
             <a:noFill/>
@@ -8385,7 +8391,7 @@
       </p:sp>
       <p:pic>
         <p:nvPicPr>
-          <p:cNvPr id="6" name="Picture 5" descr="img_4848265728.png"/>
+          <p:cNvPr id="6" name="Picture 5" descr="img_4463456448.png"/>
           <p:cNvPicPr>
             <a:picLocks noChangeAspect="1"/>
           </p:cNvPicPr>
@@ -8416,15 +8422,15 @@
         <p:spPr>
           <a:xfrm>
             <a:off x="406398" y="2205235"/>
-            <a:ext cx="632318" cy="133349"/>
-          </a:xfrm>
-          <a:prstGeom prst="rect">
-            <a:avLst/>
-          </a:prstGeom>
-          <a:noFill/>
-        </p:spPr>
-        <p:txBody>
-          <a:bodyPr wrap="none" lIns="0" rIns="0" tIns="0" bIns="0">
+            <a:ext cx="11455370" cy="133349"/>
+          </a:xfrm>
+          <a:prstGeom prst="rect">
+            <a:avLst/>
+          </a:prstGeom>
+          <a:noFill/>
+        </p:spPr>
+        <p:txBody>
+          <a:bodyPr wrap="square" lIns="0" rIns="0" tIns="0" bIns="0">
             <a:spAutoFit/>
           </a:bodyPr>
           <a:lstStyle/>
@@ -8453,15 +8459,15 @@
         <p:spPr>
           <a:xfrm>
             <a:off x="406398" y="2348904"/>
-            <a:ext cx="3131831" cy="393700"/>
-          </a:xfrm>
-          <a:prstGeom prst="rect">
-            <a:avLst/>
-          </a:prstGeom>
-          <a:noFill/>
-        </p:spPr>
-        <p:txBody>
-          <a:bodyPr wrap="none" lIns="0" rIns="0" tIns="0" bIns="0">
+            <a:ext cx="11582370" cy="444500"/>
+          </a:xfrm>
+          <a:prstGeom prst="rect">
+            <a:avLst/>
+          </a:prstGeom>
+          <a:noFill/>
+        </p:spPr>
+        <p:txBody>
+          <a:bodyPr wrap="square" lIns="0" rIns="0" tIns="0" bIns="0">
             <a:spAutoFit/>
           </a:bodyPr>
           <a:lstStyle/>
@@ -8494,15 +8500,15 @@
         <p:spPr>
           <a:xfrm>
             <a:off x="444498" y="2948285"/>
-            <a:ext cx="419098" cy="133349"/>
-          </a:xfrm>
-          <a:prstGeom prst="rect">
-            <a:avLst/>
-          </a:prstGeom>
-          <a:noFill/>
-        </p:spPr>
-        <p:txBody>
-          <a:bodyPr wrap="none" lIns="0" rIns="0" tIns="0" bIns="0">
+            <a:ext cx="5626084" cy="133349"/>
+          </a:xfrm>
+          <a:prstGeom prst="rect">
+            <a:avLst/>
+          </a:prstGeom>
+          <a:noFill/>
+        </p:spPr>
+        <p:txBody>
+          <a:bodyPr wrap="square" lIns="0" rIns="0" tIns="0" bIns="0">
             <a:spAutoFit/>
           </a:bodyPr>
           <a:lstStyle/>
@@ -8531,15 +8537,15 @@
         <p:spPr>
           <a:xfrm>
             <a:off x="406398" y="3226494"/>
-            <a:ext cx="196948" cy="190500"/>
-          </a:xfrm>
-          <a:prstGeom prst="rect">
-            <a:avLst/>
-          </a:prstGeom>
-          <a:noFill/>
-        </p:spPr>
-        <p:txBody>
-          <a:bodyPr wrap="none" lIns="0" rIns="0" tIns="0" bIns="0">
+            <a:ext cx="237587" cy="199389"/>
+          </a:xfrm>
+          <a:prstGeom prst="rect">
+            <a:avLst/>
+          </a:prstGeom>
+          <a:noFill/>
+        </p:spPr>
+        <p:txBody>
+          <a:bodyPr wrap="square" lIns="0" rIns="0" tIns="0" bIns="0">
             <a:spAutoFit/>
           </a:bodyPr>
           <a:lstStyle/>
@@ -8572,15 +8578,15 @@
         <p:spPr>
           <a:xfrm>
             <a:off x="528239" y="3226494"/>
-            <a:ext cx="685797" cy="190500"/>
-          </a:xfrm>
-          <a:prstGeom prst="rect">
-            <a:avLst/>
-          </a:prstGeom>
-          <a:noFill/>
-        </p:spPr>
-        <p:txBody>
-          <a:bodyPr wrap="none" lIns="0" rIns="0" tIns="0" bIns="0">
+            <a:ext cx="5557584" cy="199389"/>
+          </a:xfrm>
+          <a:prstGeom prst="rect">
+            <a:avLst/>
+          </a:prstGeom>
+          <a:noFill/>
+        </p:spPr>
+        <p:txBody>
+          <a:bodyPr wrap="square" lIns="0" rIns="0" tIns="0" bIns="0">
             <a:spAutoFit/>
           </a:bodyPr>
           <a:lstStyle/>
@@ -8613,15 +8619,15 @@
         <p:spPr>
           <a:xfrm>
             <a:off x="1099737" y="3226494"/>
-            <a:ext cx="1194093" cy="190500"/>
-          </a:xfrm>
-          <a:prstGeom prst="rect">
-            <a:avLst/>
-          </a:prstGeom>
-          <a:noFill/>
-        </p:spPr>
-        <p:txBody>
-          <a:bodyPr wrap="none" lIns="0" rIns="0" tIns="0" bIns="0">
+            <a:ext cx="4986085" cy="199389"/>
+          </a:xfrm>
+          <a:prstGeom prst="rect">
+            <a:avLst/>
+          </a:prstGeom>
+          <a:noFill/>
+        </p:spPr>
+        <p:txBody>
+          <a:bodyPr wrap="square" lIns="0" rIns="0" tIns="0" bIns="0">
             <a:spAutoFit/>
           </a:bodyPr>
           <a:lstStyle/>
@@ -8654,15 +8660,15 @@
         <p:spPr>
           <a:xfrm>
             <a:off x="406398" y="3525242"/>
-            <a:ext cx="196948" cy="190500"/>
-          </a:xfrm>
-          <a:prstGeom prst="rect">
-            <a:avLst/>
-          </a:prstGeom>
-          <a:noFill/>
-        </p:spPr>
-        <p:txBody>
-          <a:bodyPr wrap="none" lIns="0" rIns="0" tIns="0" bIns="0">
+            <a:ext cx="237587" cy="199389"/>
+          </a:xfrm>
+          <a:prstGeom prst="rect">
+            <a:avLst/>
+          </a:prstGeom>
+          <a:noFill/>
+        </p:spPr>
+        <p:txBody>
+          <a:bodyPr wrap="square" lIns="0" rIns="0" tIns="0" bIns="0">
             <a:spAutoFit/>
           </a:bodyPr>
           <a:lstStyle/>
@@ -8695,15 +8701,15 @@
         <p:spPr>
           <a:xfrm>
             <a:off x="528239" y="3525242"/>
-            <a:ext cx="589059" cy="190500"/>
-          </a:xfrm>
-          <a:prstGeom prst="rect">
-            <a:avLst/>
-          </a:prstGeom>
-          <a:noFill/>
-        </p:spPr>
-        <p:txBody>
-          <a:bodyPr wrap="none" lIns="0" rIns="0" tIns="0" bIns="0">
+            <a:ext cx="5557584" cy="199389"/>
+          </a:xfrm>
+          <a:prstGeom prst="rect">
+            <a:avLst/>
+          </a:prstGeom>
+          <a:noFill/>
+        </p:spPr>
+        <p:txBody>
+          <a:bodyPr wrap="square" lIns="0" rIns="0" tIns="0" bIns="0">
             <a:spAutoFit/>
           </a:bodyPr>
           <a:lstStyle/>
@@ -8736,15 +8742,15 @@
         <p:spPr>
           <a:xfrm>
             <a:off x="1002999" y="3525242"/>
-            <a:ext cx="1536993" cy="190500"/>
-          </a:xfrm>
-          <a:prstGeom prst="rect">
-            <a:avLst/>
-          </a:prstGeom>
-          <a:noFill/>
-        </p:spPr>
-        <p:txBody>
-          <a:bodyPr wrap="none" lIns="0" rIns="0" tIns="0" bIns="0">
+            <a:ext cx="5082823" cy="199389"/>
+          </a:xfrm>
+          <a:prstGeom prst="rect">
+            <a:avLst/>
+          </a:prstGeom>
+          <a:noFill/>
+        </p:spPr>
+        <p:txBody>
+          <a:bodyPr wrap="square" lIns="0" rIns="0" tIns="0" bIns="0">
             <a:spAutoFit/>
           </a:bodyPr>
           <a:lstStyle/>
@@ -8777,15 +8783,15 @@
         <p:spPr>
           <a:xfrm>
             <a:off x="406398" y="3823989"/>
-            <a:ext cx="196948" cy="190500"/>
-          </a:xfrm>
-          <a:prstGeom prst="rect">
-            <a:avLst/>
-          </a:prstGeom>
-          <a:noFill/>
-        </p:spPr>
-        <p:txBody>
-          <a:bodyPr wrap="none" lIns="0" rIns="0" tIns="0" bIns="0">
+            <a:ext cx="237587" cy="199389"/>
+          </a:xfrm>
+          <a:prstGeom prst="rect">
+            <a:avLst/>
+          </a:prstGeom>
+          <a:noFill/>
+        </p:spPr>
+        <p:txBody>
+          <a:bodyPr wrap="square" lIns="0" rIns="0" tIns="0" bIns="0">
             <a:spAutoFit/>
           </a:bodyPr>
           <a:lstStyle/>
@@ -8818,15 +8824,15 @@
         <p:spPr>
           <a:xfrm>
             <a:off x="528239" y="3823989"/>
-            <a:ext cx="589059" cy="190500"/>
-          </a:xfrm>
-          <a:prstGeom prst="rect">
-            <a:avLst/>
-          </a:prstGeom>
-          <a:noFill/>
-        </p:spPr>
-        <p:txBody>
-          <a:bodyPr wrap="none" lIns="0" rIns="0" tIns="0" bIns="0">
+            <a:ext cx="5557584" cy="199389"/>
+          </a:xfrm>
+          <a:prstGeom prst="rect">
+            <a:avLst/>
+          </a:prstGeom>
+          <a:noFill/>
+        </p:spPr>
+        <p:txBody>
+          <a:bodyPr wrap="square" lIns="0" rIns="0" tIns="0" bIns="0">
             <a:spAutoFit/>
           </a:bodyPr>
           <a:lstStyle/>
@@ -8859,15 +8865,15 @@
         <p:spPr>
           <a:xfrm>
             <a:off x="1002999" y="3823989"/>
-            <a:ext cx="1536993" cy="190500"/>
-          </a:xfrm>
-          <a:prstGeom prst="rect">
-            <a:avLst/>
-          </a:prstGeom>
-          <a:noFill/>
-        </p:spPr>
-        <p:txBody>
-          <a:bodyPr wrap="none" lIns="0" rIns="0" tIns="0" bIns="0">
+            <a:ext cx="5082823" cy="199389"/>
+          </a:xfrm>
+          <a:prstGeom prst="rect">
+            <a:avLst/>
+          </a:prstGeom>
+          <a:noFill/>
+        </p:spPr>
+        <p:txBody>
+          <a:bodyPr wrap="square" lIns="0" rIns="0" tIns="0" bIns="0">
             <a:spAutoFit/>
           </a:bodyPr>
           <a:lstStyle/>
@@ -8900,15 +8906,15 @@
         <p:spPr>
           <a:xfrm>
             <a:off x="406398" y="4122737"/>
-            <a:ext cx="196948" cy="190500"/>
-          </a:xfrm>
-          <a:prstGeom prst="rect">
-            <a:avLst/>
-          </a:prstGeom>
-          <a:noFill/>
-        </p:spPr>
-        <p:txBody>
-          <a:bodyPr wrap="none" lIns="0" rIns="0" tIns="0" bIns="0">
+            <a:ext cx="237587" cy="199389"/>
+          </a:xfrm>
+          <a:prstGeom prst="rect">
+            <a:avLst/>
+          </a:prstGeom>
+          <a:noFill/>
+        </p:spPr>
+        <p:txBody>
+          <a:bodyPr wrap="square" lIns="0" rIns="0" tIns="0" bIns="0">
             <a:spAutoFit/>
           </a:bodyPr>
           <a:lstStyle/>
@@ -8941,15 +8947,15 @@
         <p:spPr>
           <a:xfrm>
             <a:off x="528239" y="4122737"/>
-            <a:ext cx="1879892" cy="190500"/>
-          </a:xfrm>
-          <a:prstGeom prst="rect">
-            <a:avLst/>
-          </a:prstGeom>
-          <a:noFill/>
-        </p:spPr>
-        <p:txBody>
-          <a:bodyPr wrap="none" lIns="0" rIns="0" tIns="0" bIns="0">
+            <a:ext cx="5557584" cy="199389"/>
+          </a:xfrm>
+          <a:prstGeom prst="rect">
+            <a:avLst/>
+          </a:prstGeom>
+          <a:noFill/>
+        </p:spPr>
+        <p:txBody>
+          <a:bodyPr wrap="square" lIns="0" rIns="0" tIns="0" bIns="0">
             <a:spAutoFit/>
           </a:bodyPr>
           <a:lstStyle/>
@@ -8982,15 +8988,15 @@
         <p:spPr>
           <a:xfrm>
             <a:off x="406398" y="4421485"/>
-            <a:ext cx="196948" cy="190500"/>
-          </a:xfrm>
-          <a:prstGeom prst="rect">
-            <a:avLst/>
-          </a:prstGeom>
-          <a:noFill/>
-        </p:spPr>
-        <p:txBody>
-          <a:bodyPr wrap="none" lIns="0" rIns="0" tIns="0" bIns="0">
+            <a:ext cx="237587" cy="199389"/>
+          </a:xfrm>
+          <a:prstGeom prst="rect">
+            <a:avLst/>
+          </a:prstGeom>
+          <a:noFill/>
+        </p:spPr>
+        <p:txBody>
+          <a:bodyPr wrap="square" lIns="0" rIns="0" tIns="0" bIns="0">
             <a:spAutoFit/>
           </a:bodyPr>
           <a:lstStyle/>
@@ -9023,15 +9029,15 @@
         <p:spPr>
           <a:xfrm>
             <a:off x="528239" y="4421485"/>
-            <a:ext cx="1651292" cy="190500"/>
-          </a:xfrm>
-          <a:prstGeom prst="rect">
-            <a:avLst/>
-          </a:prstGeom>
-          <a:noFill/>
-        </p:spPr>
-        <p:txBody>
-          <a:bodyPr wrap="none" lIns="0" rIns="0" tIns="0" bIns="0">
+            <a:ext cx="5557584" cy="199389"/>
+          </a:xfrm>
+          <a:prstGeom prst="rect">
+            <a:avLst/>
+          </a:prstGeom>
+          <a:noFill/>
+        </p:spPr>
+        <p:txBody>
+          <a:bodyPr wrap="square" lIns="0" rIns="0" tIns="0" bIns="0">
             <a:spAutoFit/>
           </a:bodyPr>
           <a:lstStyle/>
@@ -9064,15 +9070,15 @@
         <p:spPr>
           <a:xfrm>
             <a:off x="6235684" y="2948285"/>
-            <a:ext cx="419098" cy="133349"/>
-          </a:xfrm>
-          <a:prstGeom prst="rect">
-            <a:avLst/>
-          </a:prstGeom>
-          <a:noFill/>
-        </p:spPr>
-        <p:txBody>
-          <a:bodyPr wrap="none" lIns="0" rIns="0" tIns="0" bIns="0">
+            <a:ext cx="5626084" cy="133349"/>
+          </a:xfrm>
+          <a:prstGeom prst="rect">
+            <a:avLst/>
+          </a:prstGeom>
+          <a:noFill/>
+        </p:spPr>
+        <p:txBody>
+          <a:bodyPr wrap="square" lIns="0" rIns="0" tIns="0" bIns="0">
             <a:spAutoFit/>
           </a:bodyPr>
           <a:lstStyle/>
@@ -9101,15 +9107,15 @@
         <p:spPr>
           <a:xfrm>
             <a:off x="6197584" y="3226494"/>
-            <a:ext cx="228598" cy="190500"/>
-          </a:xfrm>
-          <a:prstGeom prst="rect">
-            <a:avLst/>
-          </a:prstGeom>
-          <a:noFill/>
-        </p:spPr>
-        <p:txBody>
-          <a:bodyPr wrap="none" lIns="0" rIns="0" tIns="0" bIns="0">
+            <a:ext cx="269238" cy="199389"/>
+          </a:xfrm>
+          <a:prstGeom prst="rect">
+            <a:avLst/>
+          </a:prstGeom>
+          <a:noFill/>
+        </p:spPr>
+        <p:txBody>
+          <a:bodyPr wrap="square" lIns="0" rIns="0" tIns="0" bIns="0">
             <a:spAutoFit/>
           </a:bodyPr>
           <a:lstStyle/>
@@ -9142,15 +9148,15 @@
         <p:spPr>
           <a:xfrm>
             <a:off x="6319424" y="3226494"/>
-            <a:ext cx="1600195" cy="190500"/>
-          </a:xfrm>
-          <a:prstGeom prst="rect">
-            <a:avLst/>
-          </a:prstGeom>
-          <a:noFill/>
-        </p:spPr>
-        <p:txBody>
-          <a:bodyPr wrap="none" lIns="0" rIns="0" tIns="0" bIns="0">
+            <a:ext cx="5557584" cy="199389"/>
+          </a:xfrm>
+          <a:prstGeom prst="rect">
+            <a:avLst/>
+          </a:prstGeom>
+          <a:noFill/>
+        </p:spPr>
+        <p:txBody>
+          <a:bodyPr wrap="square" lIns="0" rIns="0" tIns="0" bIns="0">
             <a:spAutoFit/>
           </a:bodyPr>
           <a:lstStyle/>
@@ -9183,15 +9189,15 @@
         <p:spPr>
           <a:xfrm>
             <a:off x="6197584" y="3525242"/>
-            <a:ext cx="228598" cy="190500"/>
-          </a:xfrm>
-          <a:prstGeom prst="rect">
-            <a:avLst/>
-          </a:prstGeom>
-          <a:noFill/>
-        </p:spPr>
-        <p:txBody>
-          <a:bodyPr wrap="none" lIns="0" rIns="0" tIns="0" bIns="0">
+            <a:ext cx="269238" cy="199389"/>
+          </a:xfrm>
+          <a:prstGeom prst="rect">
+            <a:avLst/>
+          </a:prstGeom>
+          <a:noFill/>
+        </p:spPr>
+        <p:txBody>
+          <a:bodyPr wrap="square" lIns="0" rIns="0" tIns="0" bIns="0">
             <a:spAutoFit/>
           </a:bodyPr>
           <a:lstStyle/>
@@ -9224,15 +9230,15 @@
         <p:spPr>
           <a:xfrm>
             <a:off x="6319424" y="3525242"/>
-            <a:ext cx="1943094" cy="190500"/>
-          </a:xfrm>
-          <a:prstGeom prst="rect">
-            <a:avLst/>
-          </a:prstGeom>
-          <a:noFill/>
-        </p:spPr>
-        <p:txBody>
-          <a:bodyPr wrap="none" lIns="0" rIns="0" tIns="0" bIns="0">
+            <a:ext cx="5557584" cy="199389"/>
+          </a:xfrm>
+          <a:prstGeom prst="rect">
+            <a:avLst/>
+          </a:prstGeom>
+          <a:noFill/>
+        </p:spPr>
+        <p:txBody>
+          <a:bodyPr wrap="square" lIns="0" rIns="0" tIns="0" bIns="0">
             <a:spAutoFit/>
           </a:bodyPr>
           <a:lstStyle/>
@@ -9265,15 +9271,15 @@
         <p:spPr>
           <a:xfrm>
             <a:off x="11505178" y="6343650"/>
-            <a:ext cx="210540" cy="133349"/>
-          </a:xfrm>
-          <a:prstGeom prst="rect">
-            <a:avLst/>
-          </a:prstGeom>
-          <a:noFill/>
-        </p:spPr>
-        <p:txBody>
-          <a:bodyPr wrap="none" lIns="0" rIns="0" tIns="0" bIns="0">
+            <a:ext cx="235940" cy="133349"/>
+          </a:xfrm>
+          <a:prstGeom prst="rect">
+            <a:avLst/>
+          </a:prstGeom>
+          <a:noFill/>
+        </p:spPr>
+        <p:txBody>
+          <a:bodyPr wrap="square" lIns="0" rIns="0" tIns="0" bIns="0">
             <a:spAutoFit/>
           </a:bodyPr>
           <a:lstStyle/>
@@ -9302,15 +9308,15 @@
         <p:spPr>
           <a:xfrm>
             <a:off x="11709370" y="6343650"/>
-            <a:ext cx="190498" cy="133349"/>
-          </a:xfrm>
-          <a:prstGeom prst="rect">
-            <a:avLst/>
-          </a:prstGeom>
-          <a:noFill/>
-        </p:spPr>
-        <p:txBody>
-          <a:bodyPr wrap="none" lIns="0" rIns="0" tIns="0" bIns="0">
+            <a:ext cx="215898" cy="133349"/>
+          </a:xfrm>
+          <a:prstGeom prst="rect">
+            <a:avLst/>
+          </a:prstGeom>
+          <a:noFill/>
+        </p:spPr>
+        <p:txBody>
+          <a:bodyPr wrap="square" lIns="0" rIns="0" tIns="0" bIns="0">
             <a:spAutoFit/>
           </a:bodyPr>
           <a:lstStyle/>
@@ -9339,15 +9345,15 @@
         <p:spPr>
           <a:xfrm>
             <a:off x="694033" y="6216054"/>
-            <a:ext cx="662977" cy="222250"/>
-          </a:xfrm>
-          <a:prstGeom prst="rect">
-            <a:avLst/>
-          </a:prstGeom>
-          <a:noFill/>
-        </p:spPr>
-        <p:txBody>
-          <a:bodyPr wrap="none" lIns="0" rIns="0" tIns="0" bIns="0">
+            <a:ext cx="721905" cy="237998"/>
+          </a:xfrm>
+          <a:prstGeom prst="rect">
+            <a:avLst/>
+          </a:prstGeom>
+          <a:noFill/>
+        </p:spPr>
+        <p:txBody>
+          <a:bodyPr wrap="square" lIns="0" rIns="0" tIns="0" bIns="0">
             <a:spAutoFit/>
           </a:bodyPr>
           <a:lstStyle/>
@@ -9438,7 +9444,7 @@
         </p:nvSpPr>
         <p:spPr>
           <a:xfrm>
-            <a:off x="406324" y="3660874"/>
+            <a:off x="406398" y="3660874"/>
             <a:ext cx="304799" cy="304800"/>
           </a:xfrm>
           <a:prstGeom prst="roundRect">
@@ -9483,7 +9489,7 @@
         </p:nvSpPr>
         <p:spPr>
           <a:xfrm>
-            <a:off x="3276516" y="3660874"/>
+            <a:off x="3276591" y="3660874"/>
             <a:ext cx="304799" cy="304800"/>
           </a:xfrm>
           <a:prstGeom prst="roundRect">
@@ -9528,7 +9534,7 @@
         </p:nvSpPr>
         <p:spPr>
           <a:xfrm>
-            <a:off x="6146709" y="3660874"/>
+            <a:off x="6146784" y="3660874"/>
             <a:ext cx="304799" cy="304800"/>
           </a:xfrm>
           <a:prstGeom prst="roundRect">
@@ -9573,7 +9579,7 @@
         </p:nvSpPr>
         <p:spPr>
           <a:xfrm>
-            <a:off x="9016901" y="3660874"/>
+            <a:off x="9016977" y="3660874"/>
             <a:ext cx="304799" cy="304800"/>
           </a:xfrm>
           <a:prstGeom prst="roundRect">
@@ -9669,7 +9675,7 @@
         </p:blipFill>
         <p:spPr>
           <a:xfrm>
-            <a:off x="482523" y="3737074"/>
+            <a:off x="482598" y="3737074"/>
             <a:ext cx="152399" cy="152400"/>
           </a:xfrm>
           <a:prstGeom prst="rect">
@@ -9693,7 +9699,7 @@
         </p:blipFill>
         <p:spPr>
           <a:xfrm>
-            <a:off x="3352716" y="3737074"/>
+            <a:off x="3352791" y="3737074"/>
             <a:ext cx="152399" cy="152400"/>
           </a:xfrm>
           <a:prstGeom prst="rect">
@@ -9717,7 +9723,7 @@
         </p:blipFill>
         <p:spPr>
           <a:xfrm>
-            <a:off x="6222909" y="3737074"/>
+            <a:off x="6222984" y="3737074"/>
             <a:ext cx="152399" cy="152400"/>
           </a:xfrm>
           <a:prstGeom prst="rect">
@@ -9741,7 +9747,7 @@
         </p:blipFill>
         <p:spPr>
           <a:xfrm>
-            <a:off x="9093101" y="3737074"/>
+            <a:off x="9093176" y="3737074"/>
             <a:ext cx="152399" cy="152400"/>
           </a:xfrm>
           <a:prstGeom prst="rect">
@@ -9751,7 +9757,7 @@
       </p:pic>
       <p:pic>
         <p:nvPicPr>
-          <p:cNvPr id="12" name="Picture 11" descr="img_4848265728.png"/>
+          <p:cNvPr id="12" name="Picture 11" descr="img_4463456448.png"/>
           <p:cNvPicPr>
             <a:picLocks noChangeAspect="1"/>
           </p:cNvPicPr>
@@ -9782,15 +9788,15 @@
         <p:spPr>
           <a:xfrm>
             <a:off x="406398" y="2806104"/>
-            <a:ext cx="634997" cy="133349"/>
-          </a:xfrm>
-          <a:prstGeom prst="rect">
-            <a:avLst/>
-          </a:prstGeom>
-          <a:noFill/>
-        </p:spPr>
-        <p:txBody>
-          <a:bodyPr wrap="none" lIns="0" rIns="0" tIns="0" bIns="0">
+            <a:ext cx="11455370" cy="133349"/>
+          </a:xfrm>
+          <a:prstGeom prst="rect">
+            <a:avLst/>
+          </a:prstGeom>
+          <a:noFill/>
+        </p:spPr>
+        <p:txBody>
+          <a:bodyPr wrap="square" lIns="0" rIns="0" tIns="0" bIns="0">
             <a:spAutoFit/>
           </a:bodyPr>
           <a:lstStyle/>
@@ -9819,15 +9825,15 @@
         <p:spPr>
           <a:xfrm>
             <a:off x="406398" y="2949773"/>
-            <a:ext cx="3131831" cy="393700"/>
-          </a:xfrm>
-          <a:prstGeom prst="rect">
-            <a:avLst/>
-          </a:prstGeom>
-          <a:noFill/>
-        </p:spPr>
-        <p:txBody>
-          <a:bodyPr wrap="none" lIns="0" rIns="0" tIns="0" bIns="0">
+            <a:ext cx="11582370" cy="444500"/>
+          </a:xfrm>
+          <a:prstGeom prst="rect">
+            <a:avLst/>
+          </a:prstGeom>
+          <a:noFill/>
+        </p:spPr>
+        <p:txBody>
+          <a:bodyPr wrap="square" lIns="0" rIns="0" tIns="0" bIns="0">
             <a:spAutoFit/>
           </a:bodyPr>
           <a:lstStyle/>
@@ -9859,16 +9865,16 @@
         </p:nvSpPr>
         <p:spPr>
           <a:xfrm>
-            <a:off x="812723" y="3648174"/>
-            <a:ext cx="825497" cy="279400"/>
-          </a:xfrm>
-          <a:prstGeom prst="rect">
-            <a:avLst/>
-          </a:prstGeom>
-          <a:noFill/>
-        </p:spPr>
-        <p:txBody>
-          <a:bodyPr wrap="none" lIns="0" rIns="0" tIns="0" bIns="0">
+            <a:off x="812797" y="3648174"/>
+            <a:ext cx="1564635" cy="307340"/>
+          </a:xfrm>
+          <a:prstGeom prst="rect">
+            <a:avLst/>
+          </a:prstGeom>
+          <a:noFill/>
+        </p:spPr>
+        <p:txBody>
+          <a:bodyPr wrap="square" lIns="0" rIns="0" tIns="0" bIns="0">
             <a:spAutoFit/>
           </a:bodyPr>
           <a:lstStyle/>
@@ -9900,16 +9906,16 @@
         </p:nvSpPr>
         <p:spPr>
           <a:xfrm>
-            <a:off x="812723" y="3918545"/>
-            <a:ext cx="1536695" cy="152400"/>
-          </a:xfrm>
-          <a:prstGeom prst="rect">
-            <a:avLst/>
-          </a:prstGeom>
-          <a:noFill/>
-        </p:spPr>
-        <p:txBody>
-          <a:bodyPr wrap="none" lIns="0" rIns="0" tIns="0" bIns="0">
+            <a:off x="812797" y="3918545"/>
+            <a:ext cx="1562095" cy="153670"/>
+          </a:xfrm>
+          <a:prstGeom prst="rect">
+            <a:avLst/>
+          </a:prstGeom>
+          <a:noFill/>
+        </p:spPr>
+        <p:txBody>
+          <a:bodyPr wrap="square" lIns="0" rIns="0" tIns="0" bIns="0">
             <a:spAutoFit/>
           </a:bodyPr>
           <a:lstStyle/>
@@ -9941,16 +9947,16 @@
         </p:nvSpPr>
         <p:spPr>
           <a:xfrm>
-            <a:off x="3682915" y="3648174"/>
-            <a:ext cx="1181096" cy="279400"/>
-          </a:xfrm>
-          <a:prstGeom prst="rect">
-            <a:avLst/>
-          </a:prstGeom>
-          <a:noFill/>
-        </p:spPr>
-        <p:txBody>
-          <a:bodyPr wrap="none" lIns="0" rIns="0" tIns="0" bIns="0">
+            <a:off x="3682990" y="3648174"/>
+            <a:ext cx="1555308" cy="307340"/>
+          </a:xfrm>
+          <a:prstGeom prst="rect">
+            <a:avLst/>
+          </a:prstGeom>
+          <a:noFill/>
+        </p:spPr>
+        <p:txBody>
+          <a:bodyPr wrap="square" lIns="0" rIns="0" tIns="0" bIns="0">
             <a:spAutoFit/>
           </a:bodyPr>
           <a:lstStyle/>
@@ -9982,16 +9988,16 @@
         </p:nvSpPr>
         <p:spPr>
           <a:xfrm>
-            <a:off x="3682915" y="3918545"/>
-            <a:ext cx="1527368" cy="152400"/>
-          </a:xfrm>
-          <a:prstGeom prst="rect">
-            <a:avLst/>
-          </a:prstGeom>
-          <a:noFill/>
-        </p:spPr>
-        <p:txBody>
-          <a:bodyPr wrap="none" lIns="0" rIns="0" tIns="0" bIns="0">
+            <a:off x="3682990" y="3918545"/>
+            <a:ext cx="1552768" cy="153670"/>
+          </a:xfrm>
+          <a:prstGeom prst="rect">
+            <a:avLst/>
+          </a:prstGeom>
+          <a:noFill/>
+        </p:spPr>
+        <p:txBody>
+          <a:bodyPr wrap="square" lIns="0" rIns="0" tIns="0" bIns="0">
             <a:spAutoFit/>
           </a:bodyPr>
           <a:lstStyle/>
@@ -10023,16 +10029,16 @@
         </p:nvSpPr>
         <p:spPr>
           <a:xfrm>
-            <a:off x="6553108" y="3648174"/>
-            <a:ext cx="825497" cy="279400"/>
-          </a:xfrm>
-          <a:prstGeom prst="rect">
-            <a:avLst/>
-          </a:prstGeom>
-          <a:noFill/>
-        </p:spPr>
-        <p:txBody>
-          <a:bodyPr wrap="none" lIns="0" rIns="0" tIns="0" bIns="0">
+            <a:off x="6553183" y="3648174"/>
+            <a:ext cx="1564635" cy="307340"/>
+          </a:xfrm>
+          <a:prstGeom prst="rect">
+            <a:avLst/>
+          </a:prstGeom>
+          <a:noFill/>
+        </p:spPr>
+        <p:txBody>
+          <a:bodyPr wrap="square" lIns="0" rIns="0" tIns="0" bIns="0">
             <a:spAutoFit/>
           </a:bodyPr>
           <a:lstStyle/>
@@ -10064,16 +10070,16 @@
         </p:nvSpPr>
         <p:spPr>
           <a:xfrm>
-            <a:off x="6553108" y="3918545"/>
-            <a:ext cx="1536695" cy="152400"/>
-          </a:xfrm>
-          <a:prstGeom prst="rect">
-            <a:avLst/>
-          </a:prstGeom>
-          <a:noFill/>
-        </p:spPr>
-        <p:txBody>
-          <a:bodyPr wrap="none" lIns="0" rIns="0" tIns="0" bIns="0">
+            <a:off x="6553183" y="3918545"/>
+            <a:ext cx="1562095" cy="153670"/>
+          </a:xfrm>
+          <a:prstGeom prst="rect">
+            <a:avLst/>
+          </a:prstGeom>
+          <a:noFill/>
+        </p:spPr>
+        <p:txBody>
+          <a:bodyPr wrap="square" lIns="0" rIns="0" tIns="0" bIns="0">
             <a:spAutoFit/>
           </a:bodyPr>
           <a:lstStyle/>
@@ -10105,16 +10111,16 @@
         </p:nvSpPr>
         <p:spPr>
           <a:xfrm>
-            <a:off x="9423300" y="3648174"/>
-            <a:ext cx="825497" cy="279400"/>
-          </a:xfrm>
-          <a:prstGeom prst="rect">
-            <a:avLst/>
-          </a:prstGeom>
-          <a:noFill/>
-        </p:spPr>
-        <p:txBody>
-          <a:bodyPr wrap="none" lIns="0" rIns="0" tIns="0" bIns="0">
+            <a:off x="9423376" y="3648174"/>
+            <a:ext cx="1209036" cy="307340"/>
+          </a:xfrm>
+          <a:prstGeom prst="rect">
+            <a:avLst/>
+          </a:prstGeom>
+          <a:noFill/>
+        </p:spPr>
+        <p:txBody>
+          <a:bodyPr wrap="square" lIns="0" rIns="0" tIns="0" bIns="0">
             <a:spAutoFit/>
           </a:bodyPr>
           <a:lstStyle/>
@@ -10146,16 +10152,16 @@
         </p:nvSpPr>
         <p:spPr>
           <a:xfrm>
-            <a:off x="9423300" y="3918545"/>
-            <a:ext cx="1181096" cy="152400"/>
-          </a:xfrm>
-          <a:prstGeom prst="rect">
-            <a:avLst/>
-          </a:prstGeom>
-          <a:noFill/>
-        </p:spPr>
-        <p:txBody>
-          <a:bodyPr wrap="none" lIns="0" rIns="0" tIns="0" bIns="0">
+            <a:off x="9423376" y="3918545"/>
+            <a:ext cx="1206496" cy="153670"/>
+          </a:xfrm>
+          <a:prstGeom prst="rect">
+            <a:avLst/>
+          </a:prstGeom>
+          <a:noFill/>
+        </p:spPr>
+        <p:txBody>
+          <a:bodyPr wrap="square" lIns="0" rIns="0" tIns="0" bIns="0">
             <a:spAutoFit/>
           </a:bodyPr>
           <a:lstStyle/>
@@ -10188,15 +10194,15 @@
         <p:spPr>
           <a:xfrm>
             <a:off x="11502598" y="6343650"/>
-            <a:ext cx="213120" cy="133349"/>
-          </a:xfrm>
-          <a:prstGeom prst="rect">
-            <a:avLst/>
-          </a:prstGeom>
-          <a:noFill/>
-        </p:spPr>
-        <p:txBody>
-          <a:bodyPr wrap="none" lIns="0" rIns="0" tIns="0" bIns="0">
+            <a:ext cx="238520" cy="133349"/>
+          </a:xfrm>
+          <a:prstGeom prst="rect">
+            <a:avLst/>
+          </a:prstGeom>
+          <a:noFill/>
+        </p:spPr>
+        <p:txBody>
+          <a:bodyPr wrap="square" lIns="0" rIns="0" tIns="0" bIns="0">
             <a:spAutoFit/>
           </a:bodyPr>
           <a:lstStyle/>
@@ -10225,15 +10231,15 @@
         <p:spPr>
           <a:xfrm>
             <a:off x="11709370" y="6343650"/>
-            <a:ext cx="190498" cy="133349"/>
-          </a:xfrm>
-          <a:prstGeom prst="rect">
-            <a:avLst/>
-          </a:prstGeom>
-          <a:noFill/>
-        </p:spPr>
-        <p:txBody>
-          <a:bodyPr wrap="none" lIns="0" rIns="0" tIns="0" bIns="0">
+            <a:ext cx="215898" cy="133349"/>
+          </a:xfrm>
+          <a:prstGeom prst="rect">
+            <a:avLst/>
+          </a:prstGeom>
+          <a:noFill/>
+        </p:spPr>
+        <p:txBody>
+          <a:bodyPr wrap="square" lIns="0" rIns="0" tIns="0" bIns="0">
             <a:spAutoFit/>
           </a:bodyPr>
           <a:lstStyle/>
@@ -10262,15 +10268,15 @@
         <p:spPr>
           <a:xfrm>
             <a:off x="694033" y="6216054"/>
-            <a:ext cx="662977" cy="222250"/>
-          </a:xfrm>
-          <a:prstGeom prst="rect">
-            <a:avLst/>
-          </a:prstGeom>
-          <a:noFill/>
-        </p:spPr>
-        <p:txBody>
-          <a:bodyPr wrap="none" lIns="0" rIns="0" tIns="0" bIns="0">
+            <a:ext cx="721905" cy="237998"/>
+          </a:xfrm>
+          <a:prstGeom prst="rect">
+            <a:avLst/>
+          </a:prstGeom>
+          <a:noFill/>
+        </p:spPr>
+        <p:txBody>
+          <a:bodyPr wrap="square" lIns="0" rIns="0" tIns="0" bIns="0">
             <a:spAutoFit/>
           </a:bodyPr>
           <a:lstStyle/>
@@ -10361,7 +10367,7 @@
         </p:nvSpPr>
         <p:spPr>
           <a:xfrm>
-            <a:off x="406276" y="3660874"/>
+            <a:off x="406398" y="3660874"/>
             <a:ext cx="304799" cy="304800"/>
           </a:xfrm>
           <a:prstGeom prst="roundRect">
@@ -10406,7 +10412,7 @@
         </p:nvSpPr>
         <p:spPr>
           <a:xfrm>
-            <a:off x="3276469" y="3660874"/>
+            <a:off x="3276591" y="3660874"/>
             <a:ext cx="304799" cy="304800"/>
           </a:xfrm>
           <a:prstGeom prst="roundRect">
@@ -10451,7 +10457,7 @@
         </p:nvSpPr>
         <p:spPr>
           <a:xfrm>
-            <a:off x="6146662" y="3660874"/>
+            <a:off x="6146784" y="3660874"/>
             <a:ext cx="304799" cy="304800"/>
           </a:xfrm>
           <a:prstGeom prst="roundRect">
@@ -10496,7 +10502,7 @@
         </p:nvSpPr>
         <p:spPr>
           <a:xfrm>
-            <a:off x="9016854" y="3660874"/>
+            <a:off x="9016977" y="3660874"/>
             <a:ext cx="304799" cy="304800"/>
           </a:xfrm>
           <a:prstGeom prst="roundRect">
@@ -10592,7 +10598,7 @@
         </p:blipFill>
         <p:spPr>
           <a:xfrm>
-            <a:off x="482476" y="3737074"/>
+            <a:off x="482598" y="3737074"/>
             <a:ext cx="152399" cy="152400"/>
           </a:xfrm>
           <a:prstGeom prst="rect">
@@ -10616,7 +10622,7 @@
         </p:blipFill>
         <p:spPr>
           <a:xfrm>
-            <a:off x="3352669" y="3737074"/>
+            <a:off x="3352791" y="3737074"/>
             <a:ext cx="152399" cy="152400"/>
           </a:xfrm>
           <a:prstGeom prst="rect">
@@ -10640,7 +10646,7 @@
         </p:blipFill>
         <p:spPr>
           <a:xfrm>
-            <a:off x="6222862" y="3737074"/>
+            <a:off x="6222984" y="3737074"/>
             <a:ext cx="152399" cy="152400"/>
           </a:xfrm>
           <a:prstGeom prst="rect">
@@ -10664,7 +10670,7 @@
         </p:blipFill>
         <p:spPr>
           <a:xfrm>
-            <a:off x="9093054" y="3737074"/>
+            <a:off x="9093176" y="3737074"/>
             <a:ext cx="152399" cy="152400"/>
           </a:xfrm>
           <a:prstGeom prst="rect">
@@ -10674,7 +10680,7 @@
       </p:pic>
       <p:pic>
         <p:nvPicPr>
-          <p:cNvPr id="12" name="Picture 11" descr="img_4848265728.png"/>
+          <p:cNvPr id="12" name="Picture 11" descr="img_4463456448.png"/>
           <p:cNvPicPr>
             <a:picLocks noChangeAspect="1"/>
           </p:cNvPicPr>
@@ -10705,15 +10711,15 @@
         <p:spPr>
           <a:xfrm>
             <a:off x="406398" y="2806104"/>
-            <a:ext cx="628250" cy="133349"/>
-          </a:xfrm>
-          <a:prstGeom prst="rect">
-            <a:avLst/>
-          </a:prstGeom>
-          <a:noFill/>
-        </p:spPr>
-        <p:txBody>
-          <a:bodyPr wrap="none" lIns="0" rIns="0" tIns="0" bIns="0">
+            <a:ext cx="11455370" cy="133349"/>
+          </a:xfrm>
+          <a:prstGeom prst="rect">
+            <a:avLst/>
+          </a:prstGeom>
+          <a:noFill/>
+        </p:spPr>
+        <p:txBody>
+          <a:bodyPr wrap="square" lIns="0" rIns="0" tIns="0" bIns="0">
             <a:spAutoFit/>
           </a:bodyPr>
           <a:lstStyle/>
@@ -10742,15 +10748,15 @@
         <p:spPr>
           <a:xfrm>
             <a:off x="406398" y="2949773"/>
-            <a:ext cx="3383350" cy="393700"/>
-          </a:xfrm>
-          <a:prstGeom prst="rect">
-            <a:avLst/>
-          </a:prstGeom>
-          <a:noFill/>
-        </p:spPr>
-        <p:txBody>
-          <a:bodyPr wrap="none" lIns="0" rIns="0" tIns="0" bIns="0">
+            <a:ext cx="11582370" cy="444500"/>
+          </a:xfrm>
+          <a:prstGeom prst="rect">
+            <a:avLst/>
+          </a:prstGeom>
+          <a:noFill/>
+        </p:spPr>
+        <p:txBody>
+          <a:bodyPr wrap="square" lIns="0" rIns="0" tIns="0" bIns="0">
             <a:spAutoFit/>
           </a:bodyPr>
           <a:lstStyle/>
@@ -10782,16 +10788,16 @@
         </p:nvSpPr>
         <p:spPr>
           <a:xfrm>
-            <a:off x="812675" y="3648174"/>
-            <a:ext cx="2070094" cy="279400"/>
-          </a:xfrm>
-          <a:prstGeom prst="rect">
-            <a:avLst/>
-          </a:prstGeom>
-          <a:noFill/>
-        </p:spPr>
-        <p:txBody>
-          <a:bodyPr wrap="none" lIns="0" rIns="0" tIns="0" bIns="0">
+            <a:off x="812797" y="3648174"/>
+            <a:ext cx="2161533" cy="307340"/>
+          </a:xfrm>
+          <a:prstGeom prst="rect">
+            <a:avLst/>
+          </a:prstGeom>
+          <a:noFill/>
+        </p:spPr>
+        <p:txBody>
+          <a:bodyPr wrap="square" lIns="0" rIns="0" tIns="0" bIns="0">
             <a:spAutoFit/>
           </a:bodyPr>
           <a:lstStyle/>
@@ -10823,16 +10829,16 @@
         </p:nvSpPr>
         <p:spPr>
           <a:xfrm>
-            <a:off x="812675" y="3918545"/>
-            <a:ext cx="667640" cy="152400"/>
-          </a:xfrm>
-          <a:prstGeom prst="rect">
-            <a:avLst/>
-          </a:prstGeom>
-          <a:noFill/>
-        </p:spPr>
-        <p:txBody>
-          <a:bodyPr wrap="none" lIns="0" rIns="0" tIns="0" bIns="0">
+            <a:off x="812797" y="3918545"/>
+            <a:ext cx="2031994" cy="153670"/>
+          </a:xfrm>
+          <a:prstGeom prst="rect">
+            <a:avLst/>
+          </a:prstGeom>
+          <a:noFill/>
+        </p:spPr>
+        <p:txBody>
+          <a:bodyPr wrap="square" lIns="0" rIns="0" tIns="0" bIns="0">
             <a:spAutoFit/>
           </a:bodyPr>
           <a:lstStyle/>
@@ -10864,16 +10870,16 @@
         </p:nvSpPr>
         <p:spPr>
           <a:xfrm>
-            <a:off x="1366017" y="3918545"/>
-            <a:ext cx="309660" cy="152400"/>
-          </a:xfrm>
-          <a:prstGeom prst="rect">
-            <a:avLst/>
-          </a:prstGeom>
-          <a:noFill/>
-        </p:spPr>
-        <p:txBody>
-          <a:bodyPr wrap="none" lIns="0" rIns="0" tIns="0" bIns="0">
+            <a:off x="1366139" y="3918545"/>
+            <a:ext cx="1478652" cy="153670"/>
+          </a:xfrm>
+          <a:prstGeom prst="rect">
+            <a:avLst/>
+          </a:prstGeom>
+          <a:noFill/>
+        </p:spPr>
+        <p:txBody>
+          <a:bodyPr wrap="square" lIns="0" rIns="0" tIns="0" bIns="0">
             <a:spAutoFit/>
           </a:bodyPr>
           <a:lstStyle/>
@@ -10905,16 +10911,16 @@
         </p:nvSpPr>
         <p:spPr>
           <a:xfrm>
-            <a:off x="1561378" y="3918545"/>
-            <a:ext cx="1289939" cy="152400"/>
-          </a:xfrm>
-          <a:prstGeom prst="rect">
-            <a:avLst/>
-          </a:prstGeom>
-          <a:noFill/>
-        </p:spPr>
-        <p:txBody>
-          <a:bodyPr wrap="none" lIns="0" rIns="0" tIns="0" bIns="0">
+            <a:off x="1561500" y="3918545"/>
+            <a:ext cx="1315338" cy="153670"/>
+          </a:xfrm>
+          <a:prstGeom prst="rect">
+            <a:avLst/>
+          </a:prstGeom>
+          <a:noFill/>
+        </p:spPr>
+        <p:txBody>
+          <a:bodyPr wrap="square" lIns="0" rIns="0" tIns="0" bIns="0">
             <a:spAutoFit/>
           </a:bodyPr>
           <a:lstStyle/>
@@ -10946,16 +10952,16 @@
         </p:nvSpPr>
         <p:spPr>
           <a:xfrm>
-            <a:off x="3682868" y="3648174"/>
-            <a:ext cx="1714494" cy="279400"/>
-          </a:xfrm>
-          <a:prstGeom prst="rect">
-            <a:avLst/>
-          </a:prstGeom>
-          <a:noFill/>
-        </p:spPr>
-        <p:txBody>
-          <a:bodyPr wrap="none" lIns="0" rIns="0" tIns="0" bIns="0">
+            <a:off x="3682990" y="3648174"/>
+            <a:ext cx="1805934" cy="307340"/>
+          </a:xfrm>
+          <a:prstGeom prst="rect">
+            <a:avLst/>
+          </a:prstGeom>
+          <a:noFill/>
+        </p:spPr>
+        <p:txBody>
+          <a:bodyPr wrap="square" lIns="0" rIns="0" tIns="0" bIns="0">
             <a:spAutoFit/>
           </a:bodyPr>
           <a:lstStyle/>
@@ -10987,16 +10993,16 @@
         </p:nvSpPr>
         <p:spPr>
           <a:xfrm>
-            <a:off x="3682868" y="3918545"/>
-            <a:ext cx="1112139" cy="152400"/>
-          </a:xfrm>
-          <a:prstGeom prst="rect">
-            <a:avLst/>
-          </a:prstGeom>
-          <a:noFill/>
-        </p:spPr>
-        <p:txBody>
-          <a:bodyPr wrap="none" lIns="0" rIns="0" tIns="0" bIns="0">
+            <a:off x="3682990" y="3918545"/>
+            <a:ext cx="1676394" cy="153670"/>
+          </a:xfrm>
+          <a:prstGeom prst="rect">
+            <a:avLst/>
+          </a:prstGeom>
+          <a:noFill/>
+        </p:spPr>
+        <p:txBody>
+          <a:bodyPr wrap="square" lIns="0" rIns="0" tIns="0" bIns="0">
             <a:spAutoFit/>
           </a:bodyPr>
           <a:lstStyle/>
@@ -11028,16 +11034,16 @@
         </p:nvSpPr>
         <p:spPr>
           <a:xfrm>
-            <a:off x="4680708" y="3924895"/>
-            <a:ext cx="350240" cy="146050"/>
-          </a:xfrm>
-          <a:prstGeom prst="rect">
-            <a:avLst/>
-          </a:prstGeom>
-          <a:noFill/>
-        </p:spPr>
-        <p:txBody>
-          <a:bodyPr wrap="none" lIns="0" rIns="0" tIns="0" bIns="0">
+            <a:off x="4680831" y="3924895"/>
+            <a:ext cx="678554" cy="147320"/>
+          </a:xfrm>
+          <a:prstGeom prst="rect">
+            <a:avLst/>
+          </a:prstGeom>
+          <a:noFill/>
+        </p:spPr>
+        <p:txBody>
+          <a:bodyPr wrap="square" lIns="0" rIns="0" tIns="0" bIns="0">
             <a:spAutoFit/>
           </a:bodyPr>
           <a:lstStyle/>
@@ -11069,16 +11075,16 @@
         </p:nvSpPr>
         <p:spPr>
           <a:xfrm>
-            <a:off x="4916650" y="3918545"/>
-            <a:ext cx="312041" cy="152400"/>
-          </a:xfrm>
-          <a:prstGeom prst="rect">
-            <a:avLst/>
-          </a:prstGeom>
-          <a:noFill/>
-        </p:spPr>
-        <p:txBody>
-          <a:bodyPr wrap="none" lIns="0" rIns="0" tIns="0" bIns="0">
+            <a:off x="4916772" y="3918545"/>
+            <a:ext cx="442612" cy="153670"/>
+          </a:xfrm>
+          <a:prstGeom prst="rect">
+            <a:avLst/>
+          </a:prstGeom>
+          <a:noFill/>
+        </p:spPr>
+        <p:txBody>
+          <a:bodyPr wrap="square" lIns="0" rIns="0" tIns="0" bIns="0">
             <a:spAutoFit/>
           </a:bodyPr>
           <a:lstStyle/>
@@ -11110,16 +11116,16 @@
         </p:nvSpPr>
         <p:spPr>
           <a:xfrm>
-            <a:off x="6553060" y="3648174"/>
-            <a:ext cx="1181096" cy="279400"/>
-          </a:xfrm>
-          <a:prstGeom prst="rect">
-            <a:avLst/>
-          </a:prstGeom>
-          <a:noFill/>
-        </p:spPr>
-        <p:txBody>
-          <a:bodyPr wrap="none" lIns="0" rIns="0" tIns="0" bIns="0">
+            <a:off x="6553183" y="3648174"/>
+            <a:ext cx="2009134" cy="307340"/>
+          </a:xfrm>
+          <a:prstGeom prst="rect">
+            <a:avLst/>
+          </a:prstGeom>
+          <a:noFill/>
+        </p:spPr>
+        <p:txBody>
+          <a:bodyPr wrap="square" lIns="0" rIns="0" tIns="0" bIns="0">
             <a:spAutoFit/>
           </a:bodyPr>
           <a:lstStyle/>
@@ -11151,16 +11157,16 @@
         </p:nvSpPr>
         <p:spPr>
           <a:xfrm>
-            <a:off x="6553060" y="3918545"/>
-            <a:ext cx="1981194" cy="152400"/>
-          </a:xfrm>
-          <a:prstGeom prst="rect">
-            <a:avLst/>
-          </a:prstGeom>
-          <a:noFill/>
-        </p:spPr>
-        <p:txBody>
-          <a:bodyPr wrap="none" lIns="0" rIns="0" tIns="0" bIns="0">
+            <a:off x="6553183" y="3918545"/>
+            <a:ext cx="2006594" cy="153670"/>
+          </a:xfrm>
+          <a:prstGeom prst="rect">
+            <a:avLst/>
+          </a:prstGeom>
+          <a:noFill/>
+        </p:spPr>
+        <p:txBody>
+          <a:bodyPr wrap="square" lIns="0" rIns="0" tIns="0" bIns="0">
             <a:spAutoFit/>
           </a:bodyPr>
           <a:lstStyle/>
@@ -11192,16 +11198,16 @@
         </p:nvSpPr>
         <p:spPr>
           <a:xfrm>
-            <a:off x="9423253" y="3648174"/>
-            <a:ext cx="1536695" cy="279400"/>
-          </a:xfrm>
-          <a:prstGeom prst="rect">
-            <a:avLst/>
-          </a:prstGeom>
-          <a:noFill/>
-        </p:spPr>
-        <p:txBody>
-          <a:bodyPr wrap="none" lIns="0" rIns="0" tIns="0" bIns="0">
+            <a:off x="9423376" y="3648174"/>
+            <a:ext cx="2275833" cy="307340"/>
+          </a:xfrm>
+          <a:prstGeom prst="rect">
+            <a:avLst/>
+          </a:prstGeom>
+          <a:noFill/>
+        </p:spPr>
+        <p:txBody>
+          <a:bodyPr wrap="square" lIns="0" rIns="0" tIns="0" bIns="0">
             <a:spAutoFit/>
           </a:bodyPr>
           <a:lstStyle/>
@@ -11233,16 +11239,16 @@
         </p:nvSpPr>
         <p:spPr>
           <a:xfrm>
-            <a:off x="9423253" y="3918545"/>
-            <a:ext cx="2247893" cy="152400"/>
-          </a:xfrm>
-          <a:prstGeom prst="rect">
-            <a:avLst/>
-          </a:prstGeom>
-          <a:noFill/>
-        </p:spPr>
-        <p:txBody>
-          <a:bodyPr wrap="none" lIns="0" rIns="0" tIns="0" bIns="0">
+            <a:off x="9423376" y="3918545"/>
+            <a:ext cx="2273293" cy="153670"/>
+          </a:xfrm>
+          <a:prstGeom prst="rect">
+            <a:avLst/>
+          </a:prstGeom>
+          <a:noFill/>
+        </p:spPr>
+        <p:txBody>
+          <a:bodyPr wrap="square" lIns="0" rIns="0" tIns="0" bIns="0">
             <a:spAutoFit/>
           </a:bodyPr>
           <a:lstStyle/>
@@ -11275,15 +11281,15 @@
         <p:spPr>
           <a:xfrm>
             <a:off x="11508551" y="6343650"/>
-            <a:ext cx="207167" cy="133349"/>
-          </a:xfrm>
-          <a:prstGeom prst="rect">
-            <a:avLst/>
-          </a:prstGeom>
-          <a:noFill/>
-        </p:spPr>
-        <p:txBody>
-          <a:bodyPr wrap="none" lIns="0" rIns="0" tIns="0" bIns="0">
+            <a:ext cx="232567" cy="133349"/>
+          </a:xfrm>
+          <a:prstGeom prst="rect">
+            <a:avLst/>
+          </a:prstGeom>
+          <a:noFill/>
+        </p:spPr>
+        <p:txBody>
+          <a:bodyPr wrap="square" lIns="0" rIns="0" tIns="0" bIns="0">
             <a:spAutoFit/>
           </a:bodyPr>
           <a:lstStyle/>
@@ -11312,15 +11318,15 @@
         <p:spPr>
           <a:xfrm>
             <a:off x="11709370" y="6343650"/>
-            <a:ext cx="190498" cy="133349"/>
-          </a:xfrm>
-          <a:prstGeom prst="rect">
-            <a:avLst/>
-          </a:prstGeom>
-          <a:noFill/>
-        </p:spPr>
-        <p:txBody>
-          <a:bodyPr wrap="none" lIns="0" rIns="0" tIns="0" bIns="0">
+            <a:ext cx="215898" cy="133349"/>
+          </a:xfrm>
+          <a:prstGeom prst="rect">
+            <a:avLst/>
+          </a:prstGeom>
+          <a:noFill/>
+        </p:spPr>
+        <p:txBody>
+          <a:bodyPr wrap="square" lIns="0" rIns="0" tIns="0" bIns="0">
             <a:spAutoFit/>
           </a:bodyPr>
           <a:lstStyle/>
@@ -11349,15 +11355,15 @@
         <p:spPr>
           <a:xfrm>
             <a:off x="694033" y="6216054"/>
-            <a:ext cx="662977" cy="222250"/>
-          </a:xfrm>
-          <a:prstGeom prst="rect">
-            <a:avLst/>
-          </a:prstGeom>
-          <a:noFill/>
-        </p:spPr>
-        <p:txBody>
-          <a:bodyPr wrap="none" lIns="0" rIns="0" tIns="0" bIns="0">
+            <a:ext cx="721905" cy="237998"/>
+          </a:xfrm>
+          <a:prstGeom prst="rect">
+            <a:avLst/>
+          </a:prstGeom>
+          <a:noFill/>
+        </p:spPr>
+        <p:txBody>
+          <a:bodyPr wrap="square" lIns="0" rIns="0" tIns="0" bIns="0">
             <a:spAutoFit/>
           </a:bodyPr>
           <a:lstStyle/>
@@ -11710,7 +11716,7 @@
       </p:sp>
       <p:pic>
         <p:nvPicPr>
-          <p:cNvPr id="9" name="Picture 8" descr="img_4848265728.png"/>
+          <p:cNvPr id="9" name="Picture 8" descr="img_4463456448.png"/>
           <p:cNvPicPr>
             <a:picLocks noChangeAspect="1"/>
           </p:cNvPicPr>
@@ -11741,15 +11747,15 @@
         <p:spPr>
           <a:xfrm>
             <a:off x="406398" y="1528365"/>
-            <a:ext cx="634303" cy="133349"/>
-          </a:xfrm>
-          <a:prstGeom prst="rect">
-            <a:avLst/>
-          </a:prstGeom>
-          <a:noFill/>
-        </p:spPr>
-        <p:txBody>
-          <a:bodyPr wrap="none" lIns="0" rIns="0" tIns="0" bIns="0">
+            <a:ext cx="11455370" cy="133349"/>
+          </a:xfrm>
+          <a:prstGeom prst="rect">
+            <a:avLst/>
+          </a:prstGeom>
+          <a:noFill/>
+        </p:spPr>
+        <p:txBody>
+          <a:bodyPr wrap="square" lIns="0" rIns="0" tIns="0" bIns="0">
             <a:spAutoFit/>
           </a:bodyPr>
           <a:lstStyle/>
@@ -11778,15 +11784,15 @@
         <p:spPr>
           <a:xfrm>
             <a:off x="406398" y="1672034"/>
-            <a:ext cx="3383350" cy="393700"/>
-          </a:xfrm>
-          <a:prstGeom prst="rect">
-            <a:avLst/>
-          </a:prstGeom>
-          <a:noFill/>
-        </p:spPr>
-        <p:txBody>
-          <a:bodyPr wrap="none" lIns="0" rIns="0" tIns="0" bIns="0">
+            <a:ext cx="11582370" cy="444500"/>
+          </a:xfrm>
+          <a:prstGeom prst="rect">
+            <a:avLst/>
+          </a:prstGeom>
+          <a:noFill/>
+        </p:spPr>
+        <p:txBody>
+          <a:bodyPr wrap="square" lIns="0" rIns="0" tIns="0" bIns="0">
             <a:spAutoFit/>
           </a:bodyPr>
           <a:lstStyle/>
@@ -11819,15 +11825,15 @@
         <p:spPr>
           <a:xfrm>
             <a:off x="577848" y="2484735"/>
-            <a:ext cx="400842" cy="374650"/>
-          </a:xfrm>
-          <a:prstGeom prst="rect">
-            <a:avLst/>
-          </a:prstGeom>
-          <a:noFill/>
-        </p:spPr>
-        <p:txBody>
-          <a:bodyPr wrap="none" lIns="0" rIns="0" tIns="0" bIns="0">
+            <a:ext cx="5518135" cy="425450"/>
+          </a:xfrm>
+          <a:prstGeom prst="rect">
+            <a:avLst/>
+          </a:prstGeom>
+          <a:noFill/>
+        </p:spPr>
+        <p:txBody>
+          <a:bodyPr wrap="square" lIns="0" rIns="0" tIns="0" bIns="0">
             <a:spAutoFit/>
           </a:bodyPr>
           <a:lstStyle/>
@@ -11860,15 +11866,15 @@
         <p:spPr>
           <a:xfrm>
             <a:off x="577848" y="2814935"/>
-            <a:ext cx="1130296" cy="209550"/>
-          </a:xfrm>
-          <a:prstGeom prst="rect">
-            <a:avLst/>
-          </a:prstGeom>
-          <a:noFill/>
-        </p:spPr>
-        <p:txBody>
-          <a:bodyPr wrap="none" lIns="0" rIns="0" tIns="0" bIns="0">
+            <a:ext cx="5416535" cy="222250"/>
+          </a:xfrm>
+          <a:prstGeom prst="rect">
+            <a:avLst/>
+          </a:prstGeom>
+          <a:noFill/>
+        </p:spPr>
+        <p:txBody>
+          <a:bodyPr wrap="square" lIns="0" rIns="0" tIns="0" bIns="0">
             <a:spAutoFit/>
           </a:bodyPr>
           <a:lstStyle/>
@@ -11901,15 +11907,15 @@
         <p:spPr>
           <a:xfrm>
             <a:off x="577848" y="3011785"/>
-            <a:ext cx="1625595" cy="152400"/>
-          </a:xfrm>
-          <a:prstGeom prst="rect">
-            <a:avLst/>
-          </a:prstGeom>
-          <a:noFill/>
-        </p:spPr>
-        <p:txBody>
-          <a:bodyPr wrap="none" lIns="0" rIns="0" tIns="0" bIns="0">
+            <a:ext cx="5391135" cy="153670"/>
+          </a:xfrm>
+          <a:prstGeom prst="rect">
+            <a:avLst/>
+          </a:prstGeom>
+          <a:noFill/>
+        </p:spPr>
+        <p:txBody>
+          <a:bodyPr wrap="square" lIns="0" rIns="0" tIns="0" bIns="0">
             <a:spAutoFit/>
           </a:bodyPr>
           <a:lstStyle/>
@@ -11942,15 +11948,15 @@
         <p:spPr>
           <a:xfrm>
             <a:off x="6318233" y="2484735"/>
-            <a:ext cx="438941" cy="374650"/>
-          </a:xfrm>
-          <a:prstGeom prst="rect">
-            <a:avLst/>
-          </a:prstGeom>
-          <a:noFill/>
-        </p:spPr>
-        <p:txBody>
-          <a:bodyPr wrap="none" lIns="0" rIns="0" tIns="0" bIns="0">
+            <a:ext cx="5518135" cy="425450"/>
+          </a:xfrm>
+          <a:prstGeom prst="rect">
+            <a:avLst/>
+          </a:prstGeom>
+          <a:noFill/>
+        </p:spPr>
+        <p:txBody>
+          <a:bodyPr wrap="square" lIns="0" rIns="0" tIns="0" bIns="0">
             <a:spAutoFit/>
           </a:bodyPr>
           <a:lstStyle/>
@@ -11983,15 +11989,15 @@
         <p:spPr>
           <a:xfrm>
             <a:off x="6318233" y="2814935"/>
-            <a:ext cx="1732751" cy="209550"/>
-          </a:xfrm>
-          <a:prstGeom prst="rect">
-            <a:avLst/>
-          </a:prstGeom>
-          <a:noFill/>
-        </p:spPr>
-        <p:txBody>
-          <a:bodyPr wrap="none" lIns="0" rIns="0" tIns="0" bIns="0">
+            <a:ext cx="5416535" cy="222250"/>
+          </a:xfrm>
+          <a:prstGeom prst="rect">
+            <a:avLst/>
+          </a:prstGeom>
+          <a:noFill/>
+        </p:spPr>
+        <p:txBody>
+          <a:bodyPr wrap="square" lIns="0" rIns="0" tIns="0" bIns="0">
             <a:spAutoFit/>
           </a:bodyPr>
           <a:lstStyle/>
@@ -12024,15 +12030,15 @@
         <p:spPr>
           <a:xfrm>
             <a:off x="6318233" y="3011785"/>
-            <a:ext cx="1172365" cy="152400"/>
-          </a:xfrm>
-          <a:prstGeom prst="rect">
-            <a:avLst/>
-          </a:prstGeom>
-          <a:noFill/>
-        </p:spPr>
-        <p:txBody>
-          <a:bodyPr wrap="none" lIns="0" rIns="0" tIns="0" bIns="0">
+            <a:ext cx="5391135" cy="153670"/>
+          </a:xfrm>
+          <a:prstGeom prst="rect">
+            <a:avLst/>
+          </a:prstGeom>
+          <a:noFill/>
+        </p:spPr>
+        <p:txBody>
+          <a:bodyPr wrap="square" lIns="0" rIns="0" tIns="0" bIns="0">
             <a:spAutoFit/>
           </a:bodyPr>
           <a:lstStyle/>
@@ -12065,15 +12071,15 @@
         <p:spPr>
           <a:xfrm>
             <a:off x="577848" y="3500735"/>
-            <a:ext cx="435667" cy="374650"/>
-          </a:xfrm>
-          <a:prstGeom prst="rect">
-            <a:avLst/>
-          </a:prstGeom>
-          <a:noFill/>
-        </p:spPr>
-        <p:txBody>
-          <a:bodyPr wrap="none" lIns="0" rIns="0" tIns="0" bIns="0">
+            <a:ext cx="5518135" cy="425450"/>
+          </a:xfrm>
+          <a:prstGeom prst="rect">
+            <a:avLst/>
+          </a:prstGeom>
+          <a:noFill/>
+        </p:spPr>
+        <p:txBody>
+          <a:bodyPr wrap="square" lIns="0" rIns="0" tIns="0" bIns="0">
             <a:spAutoFit/>
           </a:bodyPr>
           <a:lstStyle/>
@@ -12106,15 +12112,15 @@
         <p:spPr>
           <a:xfrm>
             <a:off x="577848" y="3830935"/>
-            <a:ext cx="1130296" cy="209550"/>
-          </a:xfrm>
-          <a:prstGeom prst="rect">
-            <a:avLst/>
-          </a:prstGeom>
-          <a:noFill/>
-        </p:spPr>
-        <p:txBody>
-          <a:bodyPr wrap="none" lIns="0" rIns="0" tIns="0" bIns="0">
+            <a:ext cx="5416535" cy="222250"/>
+          </a:xfrm>
+          <a:prstGeom prst="rect">
+            <a:avLst/>
+          </a:prstGeom>
+          <a:noFill/>
+        </p:spPr>
+        <p:txBody>
+          <a:bodyPr wrap="square" lIns="0" rIns="0" tIns="0" bIns="0">
             <a:spAutoFit/>
           </a:bodyPr>
           <a:lstStyle/>
@@ -12147,15 +12153,15 @@
         <p:spPr>
           <a:xfrm>
             <a:off x="577848" y="4027785"/>
-            <a:ext cx="1358895" cy="152400"/>
-          </a:xfrm>
-          <a:prstGeom prst="rect">
-            <a:avLst/>
-          </a:prstGeom>
-          <a:noFill/>
-        </p:spPr>
-        <p:txBody>
-          <a:bodyPr wrap="none" lIns="0" rIns="0" tIns="0" bIns="0">
+            <a:ext cx="5391135" cy="153670"/>
+          </a:xfrm>
+          <a:prstGeom prst="rect">
+            <a:avLst/>
+          </a:prstGeom>
+          <a:noFill/>
+        </p:spPr>
+        <p:txBody>
+          <a:bodyPr wrap="square" lIns="0" rIns="0" tIns="0" bIns="0">
             <a:spAutoFit/>
           </a:bodyPr>
           <a:lstStyle/>
@@ -12188,15 +12194,15 @@
         <p:spPr>
           <a:xfrm>
             <a:off x="6318233" y="3500735"/>
-            <a:ext cx="441720" cy="374650"/>
-          </a:xfrm>
-          <a:prstGeom prst="rect">
-            <a:avLst/>
-          </a:prstGeom>
-          <a:noFill/>
-        </p:spPr>
-        <p:txBody>
-          <a:bodyPr wrap="none" lIns="0" rIns="0" tIns="0" bIns="0">
+            <a:ext cx="5518135" cy="425450"/>
+          </a:xfrm>
+          <a:prstGeom prst="rect">
+            <a:avLst/>
+          </a:prstGeom>
+          <a:noFill/>
+        </p:spPr>
+        <p:txBody>
+          <a:bodyPr wrap="square" lIns="0" rIns="0" tIns="0" bIns="0">
             <a:spAutoFit/>
           </a:bodyPr>
           <a:lstStyle/>
@@ -12229,15 +12235,15 @@
         <p:spPr>
           <a:xfrm>
             <a:off x="6318233" y="3830935"/>
-            <a:ext cx="1130296" cy="209550"/>
-          </a:xfrm>
-          <a:prstGeom prst="rect">
-            <a:avLst/>
-          </a:prstGeom>
-          <a:noFill/>
-        </p:spPr>
-        <p:txBody>
-          <a:bodyPr wrap="none" lIns="0" rIns="0" tIns="0" bIns="0">
+            <a:ext cx="5416535" cy="222250"/>
+          </a:xfrm>
+          <a:prstGeom prst="rect">
+            <a:avLst/>
+          </a:prstGeom>
+          <a:noFill/>
+        </p:spPr>
+        <p:txBody>
+          <a:bodyPr wrap="square" lIns="0" rIns="0" tIns="0" bIns="0">
             <a:spAutoFit/>
           </a:bodyPr>
           <a:lstStyle/>
@@ -12270,15 +12276,15 @@
         <p:spPr>
           <a:xfrm>
             <a:off x="6318233" y="4027785"/>
-            <a:ext cx="1447795" cy="152400"/>
-          </a:xfrm>
-          <a:prstGeom prst="rect">
-            <a:avLst/>
-          </a:prstGeom>
-          <a:noFill/>
-        </p:spPr>
-        <p:txBody>
-          <a:bodyPr wrap="none" lIns="0" rIns="0" tIns="0" bIns="0">
+            <a:ext cx="5391135" cy="153670"/>
+          </a:xfrm>
+          <a:prstGeom prst="rect">
+            <a:avLst/>
+          </a:prstGeom>
+          <a:noFill/>
+        </p:spPr>
+        <p:txBody>
+          <a:bodyPr wrap="square" lIns="0" rIns="0" tIns="0" bIns="0">
             <a:spAutoFit/>
           </a:bodyPr>
           <a:lstStyle/>
@@ -12311,15 +12317,15 @@
         <p:spPr>
           <a:xfrm>
             <a:off x="3422641" y="4516735"/>
-            <a:ext cx="435171" cy="374650"/>
-          </a:xfrm>
-          <a:prstGeom prst="rect">
-            <a:avLst/>
-          </a:prstGeom>
-          <a:noFill/>
-        </p:spPr>
-        <p:txBody>
-          <a:bodyPr wrap="none" lIns="0" rIns="0" tIns="0" bIns="0">
+            <a:ext cx="5568935" cy="425450"/>
+          </a:xfrm>
+          <a:prstGeom prst="rect">
+            <a:avLst/>
+          </a:prstGeom>
+          <a:noFill/>
+        </p:spPr>
+        <p:txBody>
+          <a:bodyPr wrap="square" lIns="0" rIns="0" tIns="0" bIns="0">
             <a:spAutoFit/>
           </a:bodyPr>
           <a:lstStyle/>
@@ -12352,15 +12358,15 @@
         <p:spPr>
           <a:xfrm>
             <a:off x="3422641" y="4846935"/>
-            <a:ext cx="1511295" cy="209550"/>
-          </a:xfrm>
-          <a:prstGeom prst="rect">
-            <a:avLst/>
-          </a:prstGeom>
-          <a:noFill/>
-        </p:spPr>
-        <p:txBody>
-          <a:bodyPr wrap="none" lIns="0" rIns="0" tIns="0" bIns="0">
+            <a:ext cx="5467335" cy="222250"/>
+          </a:xfrm>
+          <a:prstGeom prst="rect">
+            <a:avLst/>
+          </a:prstGeom>
+          <a:noFill/>
+        </p:spPr>
+        <p:txBody>
+          <a:bodyPr wrap="square" lIns="0" rIns="0" tIns="0" bIns="0">
             <a:spAutoFit/>
           </a:bodyPr>
           <a:lstStyle/>
@@ -12393,15 +12399,15 @@
         <p:spPr>
           <a:xfrm>
             <a:off x="3422641" y="5043785"/>
-            <a:ext cx="223141" cy="152400"/>
-          </a:xfrm>
-          <a:prstGeom prst="rect">
-            <a:avLst/>
-          </a:prstGeom>
-          <a:noFill/>
-        </p:spPr>
-        <p:txBody>
-          <a:bodyPr wrap="none" lIns="0" rIns="0" tIns="0" bIns="0">
+            <a:ext cx="5441935" cy="153670"/>
+          </a:xfrm>
+          <a:prstGeom prst="rect">
+            <a:avLst/>
+          </a:prstGeom>
+          <a:noFill/>
+        </p:spPr>
+        <p:txBody>
+          <a:bodyPr wrap="square" lIns="0" rIns="0" tIns="0" bIns="0">
             <a:spAutoFit/>
           </a:bodyPr>
           <a:lstStyle/>
@@ -12434,15 +12440,15 @@
         <p:spPr>
           <a:xfrm>
             <a:off x="3531483" y="5050135"/>
-            <a:ext cx="226812" cy="146050"/>
-          </a:xfrm>
-          <a:prstGeom prst="rect">
-            <a:avLst/>
-          </a:prstGeom>
-          <a:noFill/>
-        </p:spPr>
-        <p:txBody>
-          <a:bodyPr wrap="none" lIns="0" rIns="0" tIns="0" bIns="0">
+            <a:ext cx="5333092" cy="147320"/>
+          </a:xfrm>
+          <a:prstGeom prst="rect">
+            <a:avLst/>
+          </a:prstGeom>
+          <a:noFill/>
+        </p:spPr>
+        <p:txBody>
+          <a:bodyPr wrap="square" lIns="0" rIns="0" tIns="0" bIns="0">
             <a:spAutoFit/>
           </a:bodyPr>
           <a:lstStyle/>
@@ -12475,15 +12481,15 @@
         <p:spPr>
           <a:xfrm>
             <a:off x="3643997" y="5043785"/>
-            <a:ext cx="1556638" cy="152400"/>
-          </a:xfrm>
-          <a:prstGeom prst="rect">
-            <a:avLst/>
-          </a:prstGeom>
-          <a:noFill/>
-        </p:spPr>
-        <p:txBody>
-          <a:bodyPr wrap="none" lIns="0" rIns="0" tIns="0" bIns="0">
+            <a:ext cx="5220578" cy="153670"/>
+          </a:xfrm>
+          <a:prstGeom prst="rect">
+            <a:avLst/>
+          </a:prstGeom>
+          <a:noFill/>
+        </p:spPr>
+        <p:txBody>
+          <a:bodyPr wrap="square" lIns="0" rIns="0" tIns="0" bIns="0">
             <a:spAutoFit/>
           </a:bodyPr>
           <a:lstStyle/>
@@ -12516,15 +12522,15 @@
         <p:spPr>
           <a:xfrm>
             <a:off x="11502499" y="6343650"/>
-            <a:ext cx="213219" cy="133349"/>
-          </a:xfrm>
-          <a:prstGeom prst="rect">
-            <a:avLst/>
-          </a:prstGeom>
-          <a:noFill/>
-        </p:spPr>
-        <p:txBody>
-          <a:bodyPr wrap="none" lIns="0" rIns="0" tIns="0" bIns="0">
+            <a:ext cx="238619" cy="133349"/>
+          </a:xfrm>
+          <a:prstGeom prst="rect">
+            <a:avLst/>
+          </a:prstGeom>
+          <a:noFill/>
+        </p:spPr>
+        <p:txBody>
+          <a:bodyPr wrap="square" lIns="0" rIns="0" tIns="0" bIns="0">
             <a:spAutoFit/>
           </a:bodyPr>
           <a:lstStyle/>
@@ -12553,15 +12559,15 @@
         <p:spPr>
           <a:xfrm>
             <a:off x="11709370" y="6343650"/>
-            <a:ext cx="190498" cy="133349"/>
-          </a:xfrm>
-          <a:prstGeom prst="rect">
-            <a:avLst/>
-          </a:prstGeom>
-          <a:noFill/>
-        </p:spPr>
-        <p:txBody>
-          <a:bodyPr wrap="none" lIns="0" rIns="0" tIns="0" bIns="0">
+            <a:ext cx="215898" cy="133349"/>
+          </a:xfrm>
+          <a:prstGeom prst="rect">
+            <a:avLst/>
+          </a:prstGeom>
+          <a:noFill/>
+        </p:spPr>
+        <p:txBody>
+          <a:bodyPr wrap="square" lIns="0" rIns="0" tIns="0" bIns="0">
             <a:spAutoFit/>
           </a:bodyPr>
           <a:lstStyle/>
@@ -12590,15 +12596,15 @@
         <p:spPr>
           <a:xfrm>
             <a:off x="694033" y="6216054"/>
-            <a:ext cx="662977" cy="222250"/>
-          </a:xfrm>
-          <a:prstGeom prst="rect">
-            <a:avLst/>
-          </a:prstGeom>
-          <a:noFill/>
-        </p:spPr>
-        <p:txBody>
-          <a:bodyPr wrap="none" lIns="0" rIns="0" tIns="0" bIns="0">
+            <a:ext cx="721905" cy="237998"/>
+          </a:xfrm>
+          <a:prstGeom prst="rect">
+            <a:avLst/>
+          </a:prstGeom>
+          <a:noFill/>
+        </p:spPr>
+        <p:txBody>
+          <a:bodyPr wrap="square" lIns="0" rIns="0" tIns="0" bIns="0">
             <a:spAutoFit/>
           </a:bodyPr>
           <a:lstStyle/>

--- a/test/manulife-sinochem-vs-aia.pptx
+++ b/test/manulife-sinochem-vs-aia.pptx
@@ -3152,7 +3152,7 @@
       </p:sp>
       <p:pic>
         <p:nvPicPr>
-          <p:cNvPr id="3" name="Picture 2" descr="img_4463456448.png"/>
+          <p:cNvPr id="3" name="Picture 2" descr="img_4449808256.png"/>
           <p:cNvPicPr>
             <a:picLocks noChangeAspect="1"/>
           </p:cNvPicPr>
@@ -3183,7 +3183,7 @@
         <p:spPr>
           <a:xfrm>
             <a:off x="5802595" y="2441674"/>
-            <a:ext cx="726477" cy="153670"/>
+            <a:ext cx="662977" cy="153670"/>
           </a:xfrm>
           <a:prstGeom prst="rect">
             <a:avLst/>
@@ -3219,8 +3219,8 @@
         </p:nvSpPr>
         <p:spPr>
           <a:xfrm>
-            <a:off x="4916871" y="2642294"/>
-            <a:ext cx="2723984" cy="803909"/>
+            <a:off x="5199843" y="2642294"/>
+            <a:ext cx="2441013" cy="803909"/>
           </a:xfrm>
           <a:prstGeom prst="rect">
             <a:avLst/>
@@ -3261,7 +3261,7 @@
         <p:spPr>
           <a:xfrm>
             <a:off x="4916871" y="3190875"/>
-            <a:ext cx="2787484" cy="803909"/>
+            <a:ext cx="2723984" cy="803909"/>
           </a:xfrm>
           <a:prstGeom prst="rect">
             <a:avLst/>
@@ -3302,7 +3302,7 @@
         <p:spPr>
           <a:xfrm>
             <a:off x="5238736" y="4239716"/>
-            <a:ext cx="1869434" cy="199389"/>
+            <a:ext cx="1805934" cy="199389"/>
           </a:xfrm>
           <a:prstGeom prst="rect">
             <a:avLst/>
@@ -3343,7 +3343,7 @@
         <p:spPr>
           <a:xfrm>
             <a:off x="694033" y="6216054"/>
-            <a:ext cx="721905" cy="237998"/>
+            <a:ext cx="658405" cy="237998"/>
           </a:xfrm>
           <a:prstGeom prst="rect">
             <a:avLst/>
@@ -3451,7 +3451,7 @@
         <p:spPr>
           <a:xfrm>
             <a:off x="5643845" y="2362299"/>
-            <a:ext cx="1043877" cy="133349"/>
+            <a:ext cx="980377" cy="133349"/>
           </a:xfrm>
           <a:prstGeom prst="rect">
             <a:avLst/>
@@ -3488,7 +3488,7 @@
         <p:spPr>
           <a:xfrm>
             <a:off x="5100227" y="2543869"/>
-            <a:ext cx="2461312" cy="889000"/>
+            <a:ext cx="2397812" cy="889000"/>
           </a:xfrm>
           <a:prstGeom prst="rect">
             <a:avLst/>
@@ -3529,7 +3529,7 @@
         <p:spPr>
           <a:xfrm>
             <a:off x="5581635" y="3653730"/>
-            <a:ext cx="1183636" cy="199389"/>
+            <a:ext cx="1120136" cy="199389"/>
           </a:xfrm>
           <a:prstGeom prst="rect">
             <a:avLst/>
@@ -3570,7 +3570,7 @@
         <p:spPr>
           <a:xfrm>
             <a:off x="4940287" y="3980060"/>
-            <a:ext cx="2517132" cy="307340"/>
+            <a:ext cx="2453633" cy="307340"/>
           </a:xfrm>
           <a:prstGeom prst="rect">
             <a:avLst/>
@@ -3611,7 +3611,7 @@
         <p:spPr>
           <a:xfrm>
             <a:off x="5428640" y="4359771"/>
-            <a:ext cx="1474286" cy="147320"/>
+            <a:ext cx="1410787" cy="147320"/>
           </a:xfrm>
           <a:prstGeom prst="rect">
             <a:avLst/>
@@ -3937,7 +3937,7 @@
       </p:sp>
       <p:pic>
         <p:nvPicPr>
-          <p:cNvPr id="8" name="Picture 7" descr="img_4463456448.png"/>
+          <p:cNvPr id="8" name="Picture 7" descr="img_4449808256.png"/>
           <p:cNvPicPr>
             <a:picLocks noChangeAspect="1"/>
           </p:cNvPicPr>
@@ -4046,7 +4046,7 @@
         <p:spPr>
           <a:xfrm>
             <a:off x="603248" y="3286422"/>
-            <a:ext cx="292098" cy="133349"/>
+            <a:ext cx="266698" cy="133349"/>
           </a:xfrm>
           <a:prstGeom prst="rect">
             <a:avLst/>
@@ -4571,7 +4571,7 @@
         <p:spPr>
           <a:xfrm>
             <a:off x="6369033" y="3286422"/>
-            <a:ext cx="292098" cy="133349"/>
+            <a:ext cx="266698" cy="133349"/>
           </a:xfrm>
           <a:prstGeom prst="rect">
             <a:avLst/>
@@ -4850,7 +4850,7 @@
         <p:spPr>
           <a:xfrm>
             <a:off x="11515398" y="6343650"/>
-            <a:ext cx="225721" cy="133349"/>
+            <a:ext cx="162221" cy="133349"/>
           </a:xfrm>
           <a:prstGeom prst="rect">
             <a:avLst/>
@@ -4887,7 +4887,7 @@
         <p:spPr>
           <a:xfrm>
             <a:off x="11709370" y="6343650"/>
-            <a:ext cx="215898" cy="133349"/>
+            <a:ext cx="152398" cy="133349"/>
           </a:xfrm>
           <a:prstGeom prst="rect">
             <a:avLst/>
@@ -4924,7 +4924,7 @@
         <p:spPr>
           <a:xfrm>
             <a:off x="694033" y="6216054"/>
-            <a:ext cx="721905" cy="237998"/>
+            <a:ext cx="658405" cy="237998"/>
           </a:xfrm>
           <a:prstGeom prst="rect">
             <a:avLst/>
@@ -5243,7 +5243,7 @@
       </p:pic>
       <p:pic>
         <p:nvPicPr>
-          <p:cNvPr id="9" name="Picture 8" descr="img_4463456448.png"/>
+          <p:cNvPr id="9" name="Picture 8" descr="img_4449808256.png"/>
           <p:cNvPicPr>
             <a:picLocks noChangeAspect="1"/>
           </p:cNvPicPr>
@@ -5475,7 +5475,7 @@
         <p:spPr>
           <a:xfrm>
             <a:off x="2082993" y="3500735"/>
-            <a:ext cx="1295395" cy="153670"/>
+            <a:ext cx="1231896" cy="153670"/>
           </a:xfrm>
           <a:prstGeom prst="rect">
             <a:avLst/>
@@ -5557,7 +5557,7 @@
         <p:spPr>
           <a:xfrm>
             <a:off x="6553183" y="3500735"/>
-            <a:ext cx="1976927" cy="153670"/>
+            <a:ext cx="1913427" cy="153670"/>
           </a:xfrm>
           <a:prstGeom prst="rect">
             <a:avLst/>
@@ -5721,7 +5721,7 @@
         <p:spPr>
           <a:xfrm>
             <a:off x="11503987" y="6343650"/>
-            <a:ext cx="237131" cy="133349"/>
+            <a:ext cx="173631" cy="133349"/>
           </a:xfrm>
           <a:prstGeom prst="rect">
             <a:avLst/>
@@ -5758,7 +5758,7 @@
         <p:spPr>
           <a:xfrm>
             <a:off x="11709370" y="6343650"/>
-            <a:ext cx="215898" cy="133349"/>
+            <a:ext cx="152398" cy="133349"/>
           </a:xfrm>
           <a:prstGeom prst="rect">
             <a:avLst/>
@@ -5795,7 +5795,7 @@
         <p:spPr>
           <a:xfrm>
             <a:off x="694033" y="6216054"/>
-            <a:ext cx="721905" cy="237998"/>
+            <a:ext cx="658405" cy="237998"/>
           </a:xfrm>
           <a:prstGeom prst="rect">
             <a:avLst/>
@@ -6162,7 +6162,7 @@
       </p:sp>
       <p:pic>
         <p:nvPicPr>
-          <p:cNvPr id="9" name="Picture 8" descr="img_4463456448.png"/>
+          <p:cNvPr id="9" name="Picture 8" descr="img_4449808256.png"/>
           <p:cNvPicPr>
             <a:picLocks noChangeAspect="1"/>
           </p:cNvPicPr>
@@ -6271,7 +6271,7 @@
         <p:spPr>
           <a:xfrm>
             <a:off x="603248" y="3120132"/>
-            <a:ext cx="292098" cy="133349"/>
+            <a:ext cx="266698" cy="133349"/>
           </a:xfrm>
           <a:prstGeom prst="rect">
             <a:avLst/>
@@ -6673,7 +6673,7 @@
         <p:spPr>
           <a:xfrm>
             <a:off x="6369033" y="3120132"/>
-            <a:ext cx="292098" cy="133349"/>
+            <a:ext cx="266698" cy="133349"/>
           </a:xfrm>
           <a:prstGeom prst="rect">
             <a:avLst/>
@@ -6948,7 +6948,7 @@
         <p:spPr>
           <a:xfrm>
             <a:off x="11504980" y="6343650"/>
-            <a:ext cx="236139" cy="133349"/>
+            <a:ext cx="172639" cy="133349"/>
           </a:xfrm>
           <a:prstGeom prst="rect">
             <a:avLst/>
@@ -6985,7 +6985,7 @@
         <p:spPr>
           <a:xfrm>
             <a:off x="11709370" y="6343650"/>
-            <a:ext cx="215898" cy="133349"/>
+            <a:ext cx="152398" cy="133349"/>
           </a:xfrm>
           <a:prstGeom prst="rect">
             <a:avLst/>
@@ -7022,7 +7022,7 @@
         <p:spPr>
           <a:xfrm>
             <a:off x="694033" y="6216054"/>
-            <a:ext cx="721905" cy="237998"/>
+            <a:ext cx="658405" cy="237998"/>
           </a:xfrm>
           <a:prstGeom prst="rect">
             <a:avLst/>
@@ -7365,7 +7365,7 @@
       </p:pic>
       <p:pic>
         <p:nvPicPr>
-          <p:cNvPr id="10" name="Picture 9" descr="img_4463456448.png"/>
+          <p:cNvPr id="10" name="Picture 9" descr="img_4449808256.png"/>
           <p:cNvPicPr>
             <a:picLocks noChangeAspect="1"/>
           </p:cNvPicPr>
@@ -7638,7 +7638,7 @@
         <p:spPr>
           <a:xfrm>
             <a:off x="2960084" y="3605510"/>
-            <a:ext cx="597889" cy="153670"/>
+            <a:ext cx="534390" cy="153670"/>
           </a:xfrm>
           <a:prstGeom prst="rect">
             <a:avLst/>
@@ -7802,7 +7802,7 @@
         <p:spPr>
           <a:xfrm>
             <a:off x="6150951" y="3605510"/>
-            <a:ext cx="317498" cy="153670"/>
+            <a:ext cx="253998" cy="153670"/>
           </a:xfrm>
           <a:prstGeom prst="rect">
             <a:avLst/>
@@ -7966,7 +7966,7 @@
         <p:spPr>
           <a:xfrm>
             <a:off x="9444509" y="3605510"/>
-            <a:ext cx="495297" cy="153670"/>
+            <a:ext cx="431798" cy="153670"/>
           </a:xfrm>
           <a:prstGeom prst="rect">
             <a:avLst/>
@@ -8006,8 +8006,8 @@
         </p:nvSpPr>
         <p:spPr>
           <a:xfrm>
-            <a:off x="406398" y="3891260"/>
-            <a:ext cx="11582370" cy="425450"/>
+            <a:off x="5139915" y="3891260"/>
+            <a:ext cx="6848853" cy="425450"/>
           </a:xfrm>
           <a:prstGeom prst="rect">
             <a:avLst/>
@@ -8047,8 +8047,8 @@
         </p:nvSpPr>
         <p:spPr>
           <a:xfrm>
-            <a:off x="406398" y="4229000"/>
-            <a:ext cx="11455370" cy="153670"/>
+            <a:off x="5073637" y="4229000"/>
+            <a:ext cx="6788131" cy="153670"/>
           </a:xfrm>
           <a:prstGeom prst="rect">
             <a:avLst/>
@@ -8089,7 +8089,7 @@
         <p:spPr>
           <a:xfrm>
             <a:off x="11503194" y="6343650"/>
-            <a:ext cx="237925" cy="133349"/>
+            <a:ext cx="174425" cy="133349"/>
           </a:xfrm>
           <a:prstGeom prst="rect">
             <a:avLst/>
@@ -8126,7 +8126,7 @@
         <p:spPr>
           <a:xfrm>
             <a:off x="11709370" y="6343650"/>
-            <a:ext cx="215898" cy="133349"/>
+            <a:ext cx="152398" cy="133349"/>
           </a:xfrm>
           <a:prstGeom prst="rect">
             <a:avLst/>
@@ -8163,7 +8163,7 @@
         <p:spPr>
           <a:xfrm>
             <a:off x="694033" y="6216054"/>
-            <a:ext cx="721905" cy="237998"/>
+            <a:ext cx="658405" cy="237998"/>
           </a:xfrm>
           <a:prstGeom prst="rect">
             <a:avLst/>
@@ -8391,7 +8391,7 @@
       </p:sp>
       <p:pic>
         <p:nvPicPr>
-          <p:cNvPr id="6" name="Picture 5" descr="img_4463456448.png"/>
+          <p:cNvPr id="6" name="Picture 5" descr="img_4449808256.png"/>
           <p:cNvPicPr>
             <a:picLocks noChangeAspect="1"/>
           </p:cNvPicPr>
@@ -8537,7 +8537,7 @@
         <p:spPr>
           <a:xfrm>
             <a:off x="406398" y="3226494"/>
-            <a:ext cx="237587" cy="199389"/>
+            <a:ext cx="174088" cy="199389"/>
           </a:xfrm>
           <a:prstGeom prst="rect">
             <a:avLst/>
@@ -8660,7 +8660,7 @@
         <p:spPr>
           <a:xfrm>
             <a:off x="406398" y="3525242"/>
-            <a:ext cx="237587" cy="199389"/>
+            <a:ext cx="174088" cy="199389"/>
           </a:xfrm>
           <a:prstGeom prst="rect">
             <a:avLst/>
@@ -8783,7 +8783,7 @@
         <p:spPr>
           <a:xfrm>
             <a:off x="406398" y="3823989"/>
-            <a:ext cx="237587" cy="199389"/>
+            <a:ext cx="174088" cy="199389"/>
           </a:xfrm>
           <a:prstGeom prst="rect">
             <a:avLst/>
@@ -8906,7 +8906,7 @@
         <p:spPr>
           <a:xfrm>
             <a:off x="406398" y="4122737"/>
-            <a:ext cx="237587" cy="199389"/>
+            <a:ext cx="174088" cy="199389"/>
           </a:xfrm>
           <a:prstGeom prst="rect">
             <a:avLst/>
@@ -8988,7 +8988,7 @@
         <p:spPr>
           <a:xfrm>
             <a:off x="406398" y="4421485"/>
-            <a:ext cx="237587" cy="199389"/>
+            <a:ext cx="174088" cy="199389"/>
           </a:xfrm>
           <a:prstGeom prst="rect">
             <a:avLst/>
@@ -9107,7 +9107,7 @@
         <p:spPr>
           <a:xfrm>
             <a:off x="6197584" y="3226494"/>
-            <a:ext cx="269238" cy="199389"/>
+            <a:ext cx="205738" cy="199389"/>
           </a:xfrm>
           <a:prstGeom prst="rect">
             <a:avLst/>
@@ -9189,7 +9189,7 @@
         <p:spPr>
           <a:xfrm>
             <a:off x="6197584" y="3525242"/>
-            <a:ext cx="269238" cy="199389"/>
+            <a:ext cx="205738" cy="199389"/>
           </a:xfrm>
           <a:prstGeom prst="rect">
             <a:avLst/>
@@ -9271,7 +9271,7 @@
         <p:spPr>
           <a:xfrm>
             <a:off x="11505178" y="6343650"/>
-            <a:ext cx="235940" cy="133349"/>
+            <a:ext cx="172440" cy="133349"/>
           </a:xfrm>
           <a:prstGeom prst="rect">
             <a:avLst/>
@@ -9308,7 +9308,7 @@
         <p:spPr>
           <a:xfrm>
             <a:off x="11709370" y="6343650"/>
-            <a:ext cx="215898" cy="133349"/>
+            <a:ext cx="152398" cy="133349"/>
           </a:xfrm>
           <a:prstGeom prst="rect">
             <a:avLst/>
@@ -9345,7 +9345,7 @@
         <p:spPr>
           <a:xfrm>
             <a:off x="694033" y="6216054"/>
-            <a:ext cx="721905" cy="237998"/>
+            <a:ext cx="658405" cy="237998"/>
           </a:xfrm>
           <a:prstGeom prst="rect">
             <a:avLst/>
@@ -9757,7 +9757,7 @@
       </p:pic>
       <p:pic>
         <p:nvPicPr>
-          <p:cNvPr id="12" name="Picture 11" descr="img_4463456448.png"/>
+          <p:cNvPr id="12" name="Picture 11" descr="img_4449808256.png"/>
           <p:cNvPicPr>
             <a:picLocks noChangeAspect="1"/>
           </p:cNvPicPr>
@@ -9907,7 +9907,7 @@
         <p:spPr>
           <a:xfrm>
             <a:off x="812797" y="3918545"/>
-            <a:ext cx="1562095" cy="153670"/>
+            <a:ext cx="1498595" cy="153670"/>
           </a:xfrm>
           <a:prstGeom prst="rect">
             <a:avLst/>
@@ -9989,7 +9989,7 @@
         <p:spPr>
           <a:xfrm>
             <a:off x="3682990" y="3918545"/>
-            <a:ext cx="1552768" cy="153670"/>
+            <a:ext cx="1489268" cy="153670"/>
           </a:xfrm>
           <a:prstGeom prst="rect">
             <a:avLst/>
@@ -10071,7 +10071,7 @@
         <p:spPr>
           <a:xfrm>
             <a:off x="6553183" y="3918545"/>
-            <a:ext cx="1562095" cy="153670"/>
+            <a:ext cx="1498595" cy="153670"/>
           </a:xfrm>
           <a:prstGeom prst="rect">
             <a:avLst/>
@@ -10153,7 +10153,7 @@
         <p:spPr>
           <a:xfrm>
             <a:off x="9423376" y="3918545"/>
-            <a:ext cx="1206496" cy="153670"/>
+            <a:ext cx="1142996" cy="153670"/>
           </a:xfrm>
           <a:prstGeom prst="rect">
             <a:avLst/>
@@ -10194,7 +10194,7 @@
         <p:spPr>
           <a:xfrm>
             <a:off x="11502598" y="6343650"/>
-            <a:ext cx="238520" cy="133349"/>
+            <a:ext cx="175020" cy="133349"/>
           </a:xfrm>
           <a:prstGeom prst="rect">
             <a:avLst/>
@@ -10231,7 +10231,7 @@
         <p:spPr>
           <a:xfrm>
             <a:off x="11709370" y="6343650"/>
-            <a:ext cx="215898" cy="133349"/>
+            <a:ext cx="152398" cy="133349"/>
           </a:xfrm>
           <a:prstGeom prst="rect">
             <a:avLst/>
@@ -10268,7 +10268,7 @@
         <p:spPr>
           <a:xfrm>
             <a:off x="694033" y="6216054"/>
-            <a:ext cx="721905" cy="237998"/>
+            <a:ext cx="658405" cy="237998"/>
           </a:xfrm>
           <a:prstGeom prst="rect">
             <a:avLst/>
@@ -10680,7 +10680,7 @@
       </p:pic>
       <p:pic>
         <p:nvPicPr>
-          <p:cNvPr id="12" name="Picture 11" descr="img_4463456448.png"/>
+          <p:cNvPr id="12" name="Picture 11" descr="img_4449808256.png"/>
           <p:cNvPicPr>
             <a:picLocks noChangeAspect="1"/>
           </p:cNvPicPr>
@@ -10789,7 +10789,7 @@
         <p:spPr>
           <a:xfrm>
             <a:off x="812797" y="3648174"/>
-            <a:ext cx="2161533" cy="307340"/>
+            <a:ext cx="2098034" cy="307340"/>
           </a:xfrm>
           <a:prstGeom prst="rect">
             <a:avLst/>
@@ -10912,7 +10912,7 @@
         <p:spPr>
           <a:xfrm>
             <a:off x="1561500" y="3918545"/>
-            <a:ext cx="1315338" cy="153670"/>
+            <a:ext cx="1283291" cy="153670"/>
           </a:xfrm>
           <a:prstGeom prst="rect">
             <a:avLst/>
@@ -10953,7 +10953,7 @@
         <p:spPr>
           <a:xfrm>
             <a:off x="3682990" y="3648174"/>
-            <a:ext cx="1805934" cy="307340"/>
+            <a:ext cx="1742434" cy="307340"/>
           </a:xfrm>
           <a:prstGeom prst="rect">
             <a:avLst/>
@@ -11158,7 +11158,7 @@
         <p:spPr>
           <a:xfrm>
             <a:off x="6553183" y="3918545"/>
-            <a:ext cx="2006594" cy="153670"/>
+            <a:ext cx="1943094" cy="153670"/>
           </a:xfrm>
           <a:prstGeom prst="rect">
             <a:avLst/>
@@ -11240,7 +11240,7 @@
         <p:spPr>
           <a:xfrm>
             <a:off x="9423376" y="3918545"/>
-            <a:ext cx="2273293" cy="153670"/>
+            <a:ext cx="2209793" cy="153670"/>
           </a:xfrm>
           <a:prstGeom prst="rect">
             <a:avLst/>
@@ -11281,7 +11281,7 @@
         <p:spPr>
           <a:xfrm>
             <a:off x="11508551" y="6343650"/>
-            <a:ext cx="232567" cy="133349"/>
+            <a:ext cx="169067" cy="133349"/>
           </a:xfrm>
           <a:prstGeom prst="rect">
             <a:avLst/>
@@ -11318,7 +11318,7 @@
         <p:spPr>
           <a:xfrm>
             <a:off x="11709370" y="6343650"/>
-            <a:ext cx="215898" cy="133349"/>
+            <a:ext cx="152398" cy="133349"/>
           </a:xfrm>
           <a:prstGeom prst="rect">
             <a:avLst/>
@@ -11355,7 +11355,7 @@
         <p:spPr>
           <a:xfrm>
             <a:off x="694033" y="6216054"/>
-            <a:ext cx="721905" cy="237998"/>
+            <a:ext cx="658405" cy="237998"/>
           </a:xfrm>
           <a:prstGeom prst="rect">
             <a:avLst/>
@@ -11716,7 +11716,7 @@
       </p:sp>
       <p:pic>
         <p:nvPicPr>
-          <p:cNvPr id="9" name="Picture 8" descr="img_4463456448.png"/>
+          <p:cNvPr id="9" name="Picture 8" descr="img_4449808256.png"/>
           <p:cNvPicPr>
             <a:picLocks noChangeAspect="1"/>
           </p:cNvPicPr>
@@ -12522,7 +12522,7 @@
         <p:spPr>
           <a:xfrm>
             <a:off x="11502499" y="6343650"/>
-            <a:ext cx="238619" cy="133349"/>
+            <a:ext cx="175119" cy="133349"/>
           </a:xfrm>
           <a:prstGeom prst="rect">
             <a:avLst/>
@@ -12559,7 +12559,7 @@
         <p:spPr>
           <a:xfrm>
             <a:off x="11709370" y="6343650"/>
-            <a:ext cx="215898" cy="133349"/>
+            <a:ext cx="152398" cy="133349"/>
           </a:xfrm>
           <a:prstGeom prst="rect">
             <a:avLst/>
@@ -12596,7 +12596,7 @@
         <p:spPr>
           <a:xfrm>
             <a:off x="694033" y="6216054"/>
-            <a:ext cx="721905" cy="237998"/>
+            <a:ext cx="658405" cy="237998"/>
           </a:xfrm>
           <a:prstGeom prst="rect">
             <a:avLst/>
